--- a/public/templates/slide/配布資料_公文書高密度_TemplateOnly.pptx
+++ b/public/templates/slide/配布資料_公文書高密度_TemplateOnly.pptx
@@ -398,6 +398,30 @@
                 </a:solidFill>
               </a:defRPr>
             </a:lvl1pPr>
+            <a:lvl2pPr algn="ctr" marL="0" indent="0">
+              <a:buNone/>
+              <a:defRPr sz="1250" b="1">
+                <a:solidFill>
+                  <a:srgbClr val="000000"/>
+                </a:solidFill>
+              </a:defRPr>
+            </a:lvl2pPr>
+            <a:lvl3pPr algn="ctr" marL="0" indent="0">
+              <a:buNone/>
+              <a:defRPr sz="1050" b="1">
+                <a:solidFill>
+                  <a:srgbClr val="000000"/>
+                </a:solidFill>
+              </a:defRPr>
+            </a:lvl3pPr>
+            <a:lvl4pPr algn="ctr" marL="0" indent="0">
+              <a:buNone/>
+              <a:defRPr sz="900" b="1">
+                <a:solidFill>
+                  <a:srgbClr val="000000"/>
+                </a:solidFill>
+              </a:defRPr>
+            </a:lvl4pPr>
           </a:lstStyle>
           <a:p>
             <a:r>
@@ -436,6 +460,36 @@
                 <a:ea typeface="MS PGothic"/>
               </a:defRPr>
             </a:lvl1pPr>
+            <a:lvl2pPr algn="ctr" marL="0" indent="0">
+              <a:buNone/>
+              <a:defRPr sz="1050" b="0">
+                <a:solidFill>
+                  <a:srgbClr val="000000"/>
+                </a:solidFill>
+                <a:latin typeface="MS PGothic"/>
+                <a:ea typeface="MS PGothic"/>
+              </a:defRPr>
+            </a:lvl2pPr>
+            <a:lvl3pPr algn="ctr" marL="0" indent="0">
+              <a:buNone/>
+              <a:defRPr sz="900" b="0">
+                <a:solidFill>
+                  <a:srgbClr val="000000"/>
+                </a:solidFill>
+                <a:latin typeface="MS PGothic"/>
+                <a:ea typeface="MS PGothic"/>
+              </a:defRPr>
+            </a:lvl3pPr>
+            <a:lvl4pPr algn="ctr" marL="0" indent="0">
+              <a:buNone/>
+              <a:defRPr sz="750" b="0">
+                <a:solidFill>
+                  <a:srgbClr val="000000"/>
+                </a:solidFill>
+                <a:latin typeface="MS PGothic"/>
+                <a:ea typeface="MS PGothic"/>
+              </a:defRPr>
+            </a:lvl4pPr>
           </a:lstStyle>
           <a:p>
             <a:r>
@@ -516,6 +570,30 @@
                 </a:solidFill>
               </a:defRPr>
             </a:lvl1pPr>
+            <a:lvl2pPr algn="l" marL="0" indent="0">
+              <a:buNone/>
+              <a:defRPr sz="1150" b="0">
+                <a:solidFill>
+                  <a:srgbClr val="000000"/>
+                </a:solidFill>
+              </a:defRPr>
+            </a:lvl2pPr>
+            <a:lvl3pPr algn="l" marL="0" indent="0">
+              <a:buNone/>
+              <a:defRPr sz="1000" b="0">
+                <a:solidFill>
+                  <a:srgbClr val="000000"/>
+                </a:solidFill>
+              </a:defRPr>
+            </a:lvl3pPr>
+            <a:lvl4pPr algn="l" marL="0" indent="0">
+              <a:buNone/>
+              <a:defRPr sz="800" b="0">
+                <a:solidFill>
+                  <a:srgbClr val="000000"/>
+                </a:solidFill>
+              </a:defRPr>
+            </a:lvl4pPr>
           </a:lstStyle>
           <a:p>
             <a:r>
@@ -760,6 +838,36 @@
                 <a:ea typeface="MS PGothic"/>
               </a:defRPr>
             </a:lvl1pPr>
+            <a:lvl2pPr algn="l" marL="0" indent="0">
+              <a:buNone/>
+              <a:defRPr sz="950" b="0">
+                <a:solidFill>
+                  <a:srgbClr val="000000"/>
+                </a:solidFill>
+                <a:latin typeface="Consolas"/>
+                <a:ea typeface="MS PGothic"/>
+              </a:defRPr>
+            </a:lvl2pPr>
+            <a:lvl3pPr algn="l" marL="0" indent="0">
+              <a:buNone/>
+              <a:defRPr sz="850" b="0">
+                <a:solidFill>
+                  <a:srgbClr val="000000"/>
+                </a:solidFill>
+                <a:latin typeface="Consolas"/>
+                <a:ea typeface="MS PGothic"/>
+              </a:defRPr>
+            </a:lvl3pPr>
+            <a:lvl4pPr algn="l" marL="0" indent="0">
+              <a:buNone/>
+              <a:defRPr sz="700" b="0">
+                <a:solidFill>
+                  <a:srgbClr val="000000"/>
+                </a:solidFill>
+                <a:latin typeface="Consolas"/>
+                <a:ea typeface="MS PGothic"/>
+              </a:defRPr>
+            </a:lvl4pPr>
           </a:lstStyle>
           <a:p>
             <a:r>
@@ -798,6 +906,36 @@
                 <a:ea typeface="MS PGothic"/>
               </a:defRPr>
             </a:lvl1pPr>
+            <a:lvl2pPr algn="l" marL="0" indent="0">
+              <a:buNone/>
+              <a:defRPr sz="900" b="0">
+                <a:solidFill>
+                  <a:srgbClr val="595959"/>
+                </a:solidFill>
+                <a:latin typeface="MS PGothic"/>
+                <a:ea typeface="MS PGothic"/>
+              </a:defRPr>
+            </a:lvl2pPr>
+            <a:lvl3pPr algn="l" marL="0" indent="0">
+              <a:buNone/>
+              <a:defRPr sz="750" b="0">
+                <a:solidFill>
+                  <a:srgbClr val="595959"/>
+                </a:solidFill>
+                <a:latin typeface="MS PGothic"/>
+                <a:ea typeface="MS PGothic"/>
+              </a:defRPr>
+            </a:lvl3pPr>
+            <a:lvl4pPr algn="l" marL="0" indent="0">
+              <a:buNone/>
+              <a:defRPr sz="650" b="0">
+                <a:solidFill>
+                  <a:srgbClr val="595959"/>
+                </a:solidFill>
+                <a:latin typeface="MS PGothic"/>
+                <a:ea typeface="MS PGothic"/>
+              </a:defRPr>
+            </a:lvl4pPr>
           </a:lstStyle>
           <a:p>
             <a:r>
@@ -858,6 +996,39 @@
                 <a:cs typeface="MS PGothic"/>
               </a:defRPr>
             </a:lvl1pPr>
+            <a:lvl2pPr algn="r" marL="0" indent="0">
+              <a:buNone/>
+              <a:defRPr sz="800" b="0">
+                <a:solidFill>
+                  <a:srgbClr val="FFFFFF"/>
+                </a:solidFill>
+                <a:latin typeface="MS PGothic"/>
+                <a:ea typeface="MS PGothic"/>
+                <a:cs typeface="MS PGothic"/>
+              </a:defRPr>
+            </a:lvl2pPr>
+            <a:lvl3pPr algn="r" marL="0" indent="0">
+              <a:buNone/>
+              <a:defRPr sz="700" b="0">
+                <a:solidFill>
+                  <a:srgbClr val="FFFFFF"/>
+                </a:solidFill>
+                <a:latin typeface="MS PGothic"/>
+                <a:ea typeface="MS PGothic"/>
+                <a:cs typeface="MS PGothic"/>
+              </a:defRPr>
+            </a:lvl3pPr>
+            <a:lvl4pPr algn="r" marL="0" indent="0">
+              <a:buNone/>
+              <a:defRPr sz="550" b="0">
+                <a:solidFill>
+                  <a:srgbClr val="FFFFFF"/>
+                </a:solidFill>
+                <a:latin typeface="MS PGothic"/>
+                <a:ea typeface="MS PGothic"/>
+                <a:cs typeface="MS PGothic"/>
+              </a:defRPr>
+            </a:lvl4pPr>
           </a:lstStyle>
           <a:p>
             <a:r>
@@ -897,6 +1068,39 @@
                 <a:cs typeface="MS PGothic"/>
               </a:defRPr>
             </a:lvl1pPr>
+            <a:lvl2pPr algn="l" marL="0" indent="0">
+              <a:buNone/>
+              <a:defRPr sz="750" b="0">
+                <a:solidFill>
+                  <a:srgbClr val="595959"/>
+                </a:solidFill>
+                <a:latin typeface="MS PGothic"/>
+                <a:ea typeface="MS PGothic"/>
+                <a:cs typeface="MS PGothic"/>
+              </a:defRPr>
+            </a:lvl2pPr>
+            <a:lvl3pPr algn="l" marL="0" indent="0">
+              <a:buNone/>
+              <a:defRPr sz="650" b="0">
+                <a:solidFill>
+                  <a:srgbClr val="595959"/>
+                </a:solidFill>
+                <a:latin typeface="MS PGothic"/>
+                <a:ea typeface="MS PGothic"/>
+                <a:cs typeface="MS PGothic"/>
+              </a:defRPr>
+            </a:lvl3pPr>
+            <a:lvl4pPr algn="l" marL="0" indent="0">
+              <a:buNone/>
+              <a:defRPr sz="550" b="0">
+                <a:solidFill>
+                  <a:srgbClr val="595959"/>
+                </a:solidFill>
+                <a:latin typeface="MS PGothic"/>
+                <a:ea typeface="MS PGothic"/>
+                <a:cs typeface="MS PGothic"/>
+              </a:defRPr>
+            </a:lvl4pPr>
           </a:lstStyle>
           <a:p>
             <a:r>
@@ -1049,6 +1253,27 @@
                 </a:solidFill>
               </a:defRPr>
             </a:lvl1pPr>
+            <a:lvl2pPr algn="l">
+              <a:defRPr sz="1250" b="0">
+                <a:solidFill>
+                  <a:srgbClr val="1A1A1A"/>
+                </a:solidFill>
+              </a:defRPr>
+            </a:lvl2pPr>
+            <a:lvl3pPr algn="l">
+              <a:defRPr sz="1050" b="0">
+                <a:solidFill>
+                  <a:srgbClr val="1A1A1A"/>
+                </a:solidFill>
+              </a:defRPr>
+            </a:lvl3pPr>
+            <a:lvl4pPr algn="l">
+              <a:defRPr sz="900" b="0">
+                <a:solidFill>
+                  <a:srgbClr val="1A1A1A"/>
+                </a:solidFill>
+              </a:defRPr>
+            </a:lvl4pPr>
           </a:lstStyle>
           <a:p>
             <a:pPr lvl="0"/>
@@ -1204,6 +1429,39 @@
                 <a:cs typeface="MS PGothic"/>
               </a:defRPr>
             </a:lvl1pPr>
+            <a:lvl2pPr algn="r" marL="0" indent="0">
+              <a:buNone/>
+              <a:defRPr sz="800" b="0">
+                <a:solidFill>
+                  <a:srgbClr val="FFFFFF"/>
+                </a:solidFill>
+                <a:latin typeface="MS PGothic"/>
+                <a:ea typeface="MS PGothic"/>
+                <a:cs typeface="MS PGothic"/>
+              </a:defRPr>
+            </a:lvl2pPr>
+            <a:lvl3pPr algn="r" marL="0" indent="0">
+              <a:buNone/>
+              <a:defRPr sz="700" b="0">
+                <a:solidFill>
+                  <a:srgbClr val="FFFFFF"/>
+                </a:solidFill>
+                <a:latin typeface="MS PGothic"/>
+                <a:ea typeface="MS PGothic"/>
+                <a:cs typeface="MS PGothic"/>
+              </a:defRPr>
+            </a:lvl3pPr>
+            <a:lvl4pPr algn="r" marL="0" indent="0">
+              <a:buNone/>
+              <a:defRPr sz="550" b="0">
+                <a:solidFill>
+                  <a:srgbClr val="FFFFFF"/>
+                </a:solidFill>
+                <a:latin typeface="MS PGothic"/>
+                <a:ea typeface="MS PGothic"/>
+                <a:cs typeface="MS PGothic"/>
+              </a:defRPr>
+            </a:lvl4pPr>
           </a:lstStyle>
           <a:p>
             <a:r>
@@ -1243,6 +1501,39 @@
                 <a:cs typeface="MS PGothic"/>
               </a:defRPr>
             </a:lvl1pPr>
+            <a:lvl2pPr algn="l" marL="0" indent="0">
+              <a:buNone/>
+              <a:defRPr sz="750" b="0">
+                <a:solidFill>
+                  <a:srgbClr val="595959"/>
+                </a:solidFill>
+                <a:latin typeface="MS PGothic"/>
+                <a:ea typeface="MS PGothic"/>
+                <a:cs typeface="MS PGothic"/>
+              </a:defRPr>
+            </a:lvl2pPr>
+            <a:lvl3pPr algn="l" marL="0" indent="0">
+              <a:buNone/>
+              <a:defRPr sz="650" b="0">
+                <a:solidFill>
+                  <a:srgbClr val="595959"/>
+                </a:solidFill>
+                <a:latin typeface="MS PGothic"/>
+                <a:ea typeface="MS PGothic"/>
+                <a:cs typeface="MS PGothic"/>
+              </a:defRPr>
+            </a:lvl3pPr>
+            <a:lvl4pPr algn="l" marL="0" indent="0">
+              <a:buNone/>
+              <a:defRPr sz="550" b="0">
+                <a:solidFill>
+                  <a:srgbClr val="595959"/>
+                </a:solidFill>
+                <a:latin typeface="MS PGothic"/>
+                <a:ea typeface="MS PGothic"/>
+                <a:cs typeface="MS PGothic"/>
+              </a:defRPr>
+            </a:lvl4pPr>
           </a:lstStyle>
           <a:p>
             <a:r>
@@ -1578,6 +1869,39 @@
                 <a:cs typeface="MS PGothic"/>
               </a:defRPr>
             </a:lvl1pPr>
+            <a:lvl2pPr algn="l" marL="0" indent="0">
+              <a:buNone/>
+              <a:defRPr sz="1150" b="1">
+                <a:solidFill>
+                  <a:srgbClr val="FFFFFF"/>
+                </a:solidFill>
+                <a:latin typeface="MS PGothic"/>
+                <a:ea typeface="MS PGothic"/>
+                <a:cs typeface="MS PGothic"/>
+              </a:defRPr>
+            </a:lvl2pPr>
+            <a:lvl3pPr algn="l" marL="0" indent="0">
+              <a:buNone/>
+              <a:defRPr sz="1000" b="1">
+                <a:solidFill>
+                  <a:srgbClr val="FFFFFF"/>
+                </a:solidFill>
+                <a:latin typeface="MS PGothic"/>
+                <a:ea typeface="MS PGothic"/>
+                <a:cs typeface="MS PGothic"/>
+              </a:defRPr>
+            </a:lvl3pPr>
+            <a:lvl4pPr algn="l" marL="0" indent="0">
+              <a:buNone/>
+              <a:defRPr sz="800" b="1">
+                <a:solidFill>
+                  <a:srgbClr val="FFFFFF"/>
+                </a:solidFill>
+                <a:latin typeface="MS PGothic"/>
+                <a:ea typeface="MS PGothic"/>
+                <a:cs typeface="MS PGothic"/>
+              </a:defRPr>
+            </a:lvl4pPr>
           </a:lstStyle>
           <a:p>
             <a:r>
@@ -1656,6 +1980,39 @@
                 <a:cs typeface="MS PGothic"/>
               </a:defRPr>
             </a:lvl1pPr>
+            <a:lvl2pPr algn="l" marL="0" indent="0">
+              <a:buNone/>
+              <a:defRPr sz="950" b="0">
+                <a:solidFill>
+                  <a:srgbClr val="000000"/>
+                </a:solidFill>
+                <a:latin typeface="MS PGothic"/>
+                <a:ea typeface="MS PGothic"/>
+                <a:cs typeface="MS PGothic"/>
+              </a:defRPr>
+            </a:lvl2pPr>
+            <a:lvl3pPr algn="l" marL="0" indent="0">
+              <a:buNone/>
+              <a:defRPr sz="850" b="0">
+                <a:solidFill>
+                  <a:srgbClr val="000000"/>
+                </a:solidFill>
+                <a:latin typeface="MS PGothic"/>
+                <a:ea typeface="MS PGothic"/>
+                <a:cs typeface="MS PGothic"/>
+              </a:defRPr>
+            </a:lvl3pPr>
+            <a:lvl4pPr algn="l" marL="0" indent="0">
+              <a:buNone/>
+              <a:defRPr sz="700" b="0">
+                <a:solidFill>
+                  <a:srgbClr val="000000"/>
+                </a:solidFill>
+                <a:latin typeface="MS PGothic"/>
+                <a:ea typeface="MS PGothic"/>
+                <a:cs typeface="MS PGothic"/>
+              </a:defRPr>
+            </a:lvl4pPr>
           </a:lstStyle>
           <a:p>
             <a:r>
@@ -1695,6 +2052,39 @@
                 <a:cs typeface="MS PGothic"/>
               </a:defRPr>
             </a:lvl1pPr>
+            <a:lvl2pPr algn="l" marL="0" indent="0">
+              <a:buNone/>
+              <a:defRPr sz="1150" b="1">
+                <a:solidFill>
+                  <a:srgbClr val="FFFFFF"/>
+                </a:solidFill>
+                <a:latin typeface="MS PGothic"/>
+                <a:ea typeface="MS PGothic"/>
+                <a:cs typeface="MS PGothic"/>
+              </a:defRPr>
+            </a:lvl2pPr>
+            <a:lvl3pPr algn="l" marL="0" indent="0">
+              <a:buNone/>
+              <a:defRPr sz="1000" b="1">
+                <a:solidFill>
+                  <a:srgbClr val="FFFFFF"/>
+                </a:solidFill>
+                <a:latin typeface="MS PGothic"/>
+                <a:ea typeface="MS PGothic"/>
+                <a:cs typeface="MS PGothic"/>
+              </a:defRPr>
+            </a:lvl3pPr>
+            <a:lvl4pPr algn="l" marL="0" indent="0">
+              <a:buNone/>
+              <a:defRPr sz="800" b="1">
+                <a:solidFill>
+                  <a:srgbClr val="FFFFFF"/>
+                </a:solidFill>
+                <a:latin typeface="MS PGothic"/>
+                <a:ea typeface="MS PGothic"/>
+                <a:cs typeface="MS PGothic"/>
+              </a:defRPr>
+            </a:lvl4pPr>
           </a:lstStyle>
           <a:p>
             <a:r>
@@ -1773,6 +2163,39 @@
                 <a:cs typeface="MS PGothic"/>
               </a:defRPr>
             </a:lvl1pPr>
+            <a:lvl2pPr algn="l" marL="0" indent="0">
+              <a:buNone/>
+              <a:defRPr sz="950" b="0">
+                <a:solidFill>
+                  <a:srgbClr val="000000"/>
+                </a:solidFill>
+                <a:latin typeface="MS PGothic"/>
+                <a:ea typeface="MS PGothic"/>
+                <a:cs typeface="MS PGothic"/>
+              </a:defRPr>
+            </a:lvl2pPr>
+            <a:lvl3pPr algn="l" marL="0" indent="0">
+              <a:buNone/>
+              <a:defRPr sz="850" b="0">
+                <a:solidFill>
+                  <a:srgbClr val="000000"/>
+                </a:solidFill>
+                <a:latin typeface="MS PGothic"/>
+                <a:ea typeface="MS PGothic"/>
+                <a:cs typeface="MS PGothic"/>
+              </a:defRPr>
+            </a:lvl3pPr>
+            <a:lvl4pPr algn="l" marL="0" indent="0">
+              <a:buNone/>
+              <a:defRPr sz="700" b="0">
+                <a:solidFill>
+                  <a:srgbClr val="000000"/>
+                </a:solidFill>
+                <a:latin typeface="MS PGothic"/>
+                <a:ea typeface="MS PGothic"/>
+                <a:cs typeface="MS PGothic"/>
+              </a:defRPr>
+            </a:lvl4pPr>
           </a:lstStyle>
           <a:p>
             <a:r>
@@ -1812,6 +2235,39 @@
                 <a:cs typeface="MS PGothic"/>
               </a:defRPr>
             </a:lvl1pPr>
+            <a:lvl2pPr algn="l" marL="0" indent="0">
+              <a:buNone/>
+              <a:defRPr sz="1150" b="1">
+                <a:solidFill>
+                  <a:srgbClr val="FFFFFF"/>
+                </a:solidFill>
+                <a:latin typeface="MS PGothic"/>
+                <a:ea typeface="MS PGothic"/>
+                <a:cs typeface="MS PGothic"/>
+              </a:defRPr>
+            </a:lvl2pPr>
+            <a:lvl3pPr algn="l" marL="0" indent="0">
+              <a:buNone/>
+              <a:defRPr sz="1000" b="1">
+                <a:solidFill>
+                  <a:srgbClr val="FFFFFF"/>
+                </a:solidFill>
+                <a:latin typeface="MS PGothic"/>
+                <a:ea typeface="MS PGothic"/>
+                <a:cs typeface="MS PGothic"/>
+              </a:defRPr>
+            </a:lvl3pPr>
+            <a:lvl4pPr algn="l" marL="0" indent="0">
+              <a:buNone/>
+              <a:defRPr sz="800" b="1">
+                <a:solidFill>
+                  <a:srgbClr val="FFFFFF"/>
+                </a:solidFill>
+                <a:latin typeface="MS PGothic"/>
+                <a:ea typeface="MS PGothic"/>
+                <a:cs typeface="MS PGothic"/>
+              </a:defRPr>
+            </a:lvl4pPr>
           </a:lstStyle>
           <a:p>
             <a:r>
@@ -1890,6 +2346,39 @@
                 <a:cs typeface="MS PGothic"/>
               </a:defRPr>
             </a:lvl1pPr>
+            <a:lvl2pPr algn="l" marL="0" indent="0">
+              <a:buNone/>
+              <a:defRPr sz="950" b="0">
+                <a:solidFill>
+                  <a:srgbClr val="000000"/>
+                </a:solidFill>
+                <a:latin typeface="MS PGothic"/>
+                <a:ea typeface="MS PGothic"/>
+                <a:cs typeface="MS PGothic"/>
+              </a:defRPr>
+            </a:lvl2pPr>
+            <a:lvl3pPr algn="l" marL="0" indent="0">
+              <a:buNone/>
+              <a:defRPr sz="850" b="0">
+                <a:solidFill>
+                  <a:srgbClr val="000000"/>
+                </a:solidFill>
+                <a:latin typeface="MS PGothic"/>
+                <a:ea typeface="MS PGothic"/>
+                <a:cs typeface="MS PGothic"/>
+              </a:defRPr>
+            </a:lvl3pPr>
+            <a:lvl4pPr algn="l" marL="0" indent="0">
+              <a:buNone/>
+              <a:defRPr sz="700" b="0">
+                <a:solidFill>
+                  <a:srgbClr val="000000"/>
+                </a:solidFill>
+                <a:latin typeface="MS PGothic"/>
+                <a:ea typeface="MS PGothic"/>
+                <a:cs typeface="MS PGothic"/>
+              </a:defRPr>
+            </a:lvl4pPr>
           </a:lstStyle>
           <a:p>
             <a:r>
@@ -2016,6 +2505,39 @@
                 <a:cs typeface="MS PGothic"/>
               </a:defRPr>
             </a:lvl1pPr>
+            <a:lvl2pPr algn="r" marL="0" indent="0">
+              <a:buNone/>
+              <a:defRPr sz="800" b="0">
+                <a:solidFill>
+                  <a:srgbClr val="FFFFFF"/>
+                </a:solidFill>
+                <a:latin typeface="MS PGothic"/>
+                <a:ea typeface="MS PGothic"/>
+                <a:cs typeface="MS PGothic"/>
+              </a:defRPr>
+            </a:lvl2pPr>
+            <a:lvl3pPr algn="r" marL="0" indent="0">
+              <a:buNone/>
+              <a:defRPr sz="700" b="0">
+                <a:solidFill>
+                  <a:srgbClr val="FFFFFF"/>
+                </a:solidFill>
+                <a:latin typeface="MS PGothic"/>
+                <a:ea typeface="MS PGothic"/>
+                <a:cs typeface="MS PGothic"/>
+              </a:defRPr>
+            </a:lvl3pPr>
+            <a:lvl4pPr algn="r" marL="0" indent="0">
+              <a:buNone/>
+              <a:defRPr sz="550" b="0">
+                <a:solidFill>
+                  <a:srgbClr val="FFFFFF"/>
+                </a:solidFill>
+                <a:latin typeface="MS PGothic"/>
+                <a:ea typeface="MS PGothic"/>
+                <a:cs typeface="MS PGothic"/>
+              </a:defRPr>
+            </a:lvl4pPr>
           </a:lstStyle>
           <a:p>
             <a:r>
@@ -2055,6 +2577,39 @@
                 <a:cs typeface="MS PGothic"/>
               </a:defRPr>
             </a:lvl1pPr>
+            <a:lvl2pPr algn="l" marL="0" indent="0">
+              <a:buNone/>
+              <a:defRPr sz="750" b="0">
+                <a:solidFill>
+                  <a:srgbClr val="595959"/>
+                </a:solidFill>
+                <a:latin typeface="MS PGothic"/>
+                <a:ea typeface="MS PGothic"/>
+                <a:cs typeface="MS PGothic"/>
+              </a:defRPr>
+            </a:lvl2pPr>
+            <a:lvl3pPr algn="l" marL="0" indent="0">
+              <a:buNone/>
+              <a:defRPr sz="650" b="0">
+                <a:solidFill>
+                  <a:srgbClr val="595959"/>
+                </a:solidFill>
+                <a:latin typeface="MS PGothic"/>
+                <a:ea typeface="MS PGothic"/>
+                <a:cs typeface="MS PGothic"/>
+              </a:defRPr>
+            </a:lvl3pPr>
+            <a:lvl4pPr algn="l" marL="0" indent="0">
+              <a:buNone/>
+              <a:defRPr sz="550" b="0">
+                <a:solidFill>
+                  <a:srgbClr val="595959"/>
+                </a:solidFill>
+                <a:latin typeface="MS PGothic"/>
+                <a:ea typeface="MS PGothic"/>
+                <a:cs typeface="MS PGothic"/>
+              </a:defRPr>
+            </a:lvl4pPr>
           </a:lstStyle>
           <a:p>
             <a:r>
@@ -2390,6 +2945,39 @@
                 <a:cs typeface="MS PGothic"/>
               </a:defRPr>
             </a:lvl1pPr>
+            <a:lvl2pPr algn="l" marL="0" indent="0">
+              <a:buNone/>
+              <a:defRPr sz="1000" b="0">
+                <a:solidFill>
+                  <a:srgbClr val="000000"/>
+                </a:solidFill>
+                <a:latin typeface="MS PGothic"/>
+                <a:ea typeface="MS PGothic"/>
+                <a:cs typeface="MS PGothic"/>
+              </a:defRPr>
+            </a:lvl2pPr>
+            <a:lvl3pPr algn="l" marL="0" indent="0">
+              <a:buNone/>
+              <a:defRPr sz="850" b="0">
+                <a:solidFill>
+                  <a:srgbClr val="000000"/>
+                </a:solidFill>
+                <a:latin typeface="MS PGothic"/>
+                <a:ea typeface="MS PGothic"/>
+                <a:cs typeface="MS PGothic"/>
+              </a:defRPr>
+            </a:lvl3pPr>
+            <a:lvl4pPr algn="l" marL="0" indent="0">
+              <a:buNone/>
+              <a:defRPr sz="700" b="0">
+                <a:solidFill>
+                  <a:srgbClr val="000000"/>
+                </a:solidFill>
+                <a:latin typeface="MS PGothic"/>
+                <a:ea typeface="MS PGothic"/>
+                <a:cs typeface="MS PGothic"/>
+              </a:defRPr>
+            </a:lvl4pPr>
           </a:lstStyle>
           <a:p>
             <a:r>
@@ -2429,6 +3017,39 @@
                 <a:cs typeface="MS PGothic"/>
               </a:defRPr>
             </a:lvl1pPr>
+            <a:lvl2pPr algn="l" marL="0" indent="0">
+              <a:buNone/>
+              <a:defRPr sz="1000" b="0">
+                <a:solidFill>
+                  <a:srgbClr val="000000"/>
+                </a:solidFill>
+                <a:latin typeface="MS PGothic"/>
+                <a:ea typeface="MS PGothic"/>
+                <a:cs typeface="MS PGothic"/>
+              </a:defRPr>
+            </a:lvl2pPr>
+            <a:lvl3pPr algn="l" marL="0" indent="0">
+              <a:buNone/>
+              <a:defRPr sz="850" b="0">
+                <a:solidFill>
+                  <a:srgbClr val="000000"/>
+                </a:solidFill>
+                <a:latin typeface="MS PGothic"/>
+                <a:ea typeface="MS PGothic"/>
+                <a:cs typeface="MS PGothic"/>
+              </a:defRPr>
+            </a:lvl3pPr>
+            <a:lvl4pPr algn="l" marL="0" indent="0">
+              <a:buNone/>
+              <a:defRPr sz="700" b="0">
+                <a:solidFill>
+                  <a:srgbClr val="000000"/>
+                </a:solidFill>
+                <a:latin typeface="MS PGothic"/>
+                <a:ea typeface="MS PGothic"/>
+                <a:cs typeface="MS PGothic"/>
+              </a:defRPr>
+            </a:lvl4pPr>
           </a:lstStyle>
           <a:p>
             <a:r>
@@ -2468,6 +3089,39 @@
                 <a:cs typeface="MS PGothic"/>
               </a:defRPr>
             </a:lvl1pPr>
+            <a:lvl2pPr algn="l" marL="0" indent="0">
+              <a:buNone/>
+              <a:defRPr sz="1000" b="0">
+                <a:solidFill>
+                  <a:srgbClr val="000000"/>
+                </a:solidFill>
+                <a:latin typeface="MS PGothic"/>
+                <a:ea typeface="MS PGothic"/>
+                <a:cs typeface="MS PGothic"/>
+              </a:defRPr>
+            </a:lvl2pPr>
+            <a:lvl3pPr algn="l" marL="0" indent="0">
+              <a:buNone/>
+              <a:defRPr sz="850" b="0">
+                <a:solidFill>
+                  <a:srgbClr val="000000"/>
+                </a:solidFill>
+                <a:latin typeface="MS PGothic"/>
+                <a:ea typeface="MS PGothic"/>
+                <a:cs typeface="MS PGothic"/>
+              </a:defRPr>
+            </a:lvl3pPr>
+            <a:lvl4pPr algn="l" marL="0" indent="0">
+              <a:buNone/>
+              <a:defRPr sz="700" b="0">
+                <a:solidFill>
+                  <a:srgbClr val="000000"/>
+                </a:solidFill>
+                <a:latin typeface="MS PGothic"/>
+                <a:ea typeface="MS PGothic"/>
+                <a:cs typeface="MS PGothic"/>
+              </a:defRPr>
+            </a:lvl4pPr>
           </a:lstStyle>
           <a:p>
             <a:r>
@@ -2550,6 +3204,39 @@
                 <a:cs typeface="MS PGothic"/>
               </a:defRPr>
             </a:lvl1pPr>
+            <a:lvl2pPr algn="ctr" marL="0" indent="0">
+              <a:buNone/>
+              <a:defRPr sz="1250" b="1">
+                <a:solidFill>
+                  <a:srgbClr val="FFFFFF"/>
+                </a:solidFill>
+                <a:latin typeface="MS PGothic"/>
+                <a:ea typeface="MS PGothic"/>
+                <a:cs typeface="MS PGothic"/>
+              </a:defRPr>
+            </a:lvl2pPr>
+            <a:lvl3pPr algn="ctr" marL="0" indent="0">
+              <a:buNone/>
+              <a:defRPr sz="1050" b="1">
+                <a:solidFill>
+                  <a:srgbClr val="FFFFFF"/>
+                </a:solidFill>
+                <a:latin typeface="MS PGothic"/>
+                <a:ea typeface="MS PGothic"/>
+                <a:cs typeface="MS PGothic"/>
+              </a:defRPr>
+            </a:lvl3pPr>
+            <a:lvl4pPr algn="ctr" marL="0" indent="0">
+              <a:buNone/>
+              <a:defRPr sz="900" b="1">
+                <a:solidFill>
+                  <a:srgbClr val="FFFFFF"/>
+                </a:solidFill>
+                <a:latin typeface="MS PGothic"/>
+                <a:ea typeface="MS PGothic"/>
+                <a:cs typeface="MS PGothic"/>
+              </a:defRPr>
+            </a:lvl4pPr>
           </a:lstStyle>
           <a:p>
             <a:r>
@@ -2589,6 +3276,39 @@
                 <a:cs typeface="MS PGothic"/>
               </a:defRPr>
             </a:lvl1pPr>
+            <a:lvl2pPr algn="l" marL="0" indent="0">
+              <a:buNone/>
+              <a:defRPr sz="1250" b="1">
+                <a:solidFill>
+                  <a:srgbClr val="000000"/>
+                </a:solidFill>
+                <a:latin typeface="MS PGothic"/>
+                <a:ea typeface="MS PGothic"/>
+                <a:cs typeface="MS PGothic"/>
+              </a:defRPr>
+            </a:lvl2pPr>
+            <a:lvl3pPr algn="l" marL="0" indent="0">
+              <a:buNone/>
+              <a:defRPr sz="1050" b="1">
+                <a:solidFill>
+                  <a:srgbClr val="000000"/>
+                </a:solidFill>
+                <a:latin typeface="MS PGothic"/>
+                <a:ea typeface="MS PGothic"/>
+                <a:cs typeface="MS PGothic"/>
+              </a:defRPr>
+            </a:lvl3pPr>
+            <a:lvl4pPr algn="l" marL="0" indent="0">
+              <a:buNone/>
+              <a:defRPr sz="900" b="1">
+                <a:solidFill>
+                  <a:srgbClr val="000000"/>
+                </a:solidFill>
+                <a:latin typeface="MS PGothic"/>
+                <a:ea typeface="MS PGothic"/>
+                <a:cs typeface="MS PGothic"/>
+              </a:defRPr>
+            </a:lvl4pPr>
           </a:lstStyle>
           <a:p>
             <a:r>
@@ -2672,6 +3392,39 @@
                 <a:cs typeface="MS PGothic"/>
               </a:defRPr>
             </a:lvl1pPr>
+            <a:lvl2pPr algn="ctr" marL="0" indent="0">
+              <a:buNone/>
+              <a:defRPr sz="1250" b="1">
+                <a:solidFill>
+                  <a:srgbClr val="FFFFFF"/>
+                </a:solidFill>
+                <a:latin typeface="MS PGothic"/>
+                <a:ea typeface="MS PGothic"/>
+                <a:cs typeface="MS PGothic"/>
+              </a:defRPr>
+            </a:lvl2pPr>
+            <a:lvl3pPr algn="ctr" marL="0" indent="0">
+              <a:buNone/>
+              <a:defRPr sz="1050" b="1">
+                <a:solidFill>
+                  <a:srgbClr val="FFFFFF"/>
+                </a:solidFill>
+                <a:latin typeface="MS PGothic"/>
+                <a:ea typeface="MS PGothic"/>
+                <a:cs typeface="MS PGothic"/>
+              </a:defRPr>
+            </a:lvl3pPr>
+            <a:lvl4pPr algn="ctr" marL="0" indent="0">
+              <a:buNone/>
+              <a:defRPr sz="900" b="1">
+                <a:solidFill>
+                  <a:srgbClr val="FFFFFF"/>
+                </a:solidFill>
+                <a:latin typeface="MS PGothic"/>
+                <a:ea typeface="MS PGothic"/>
+                <a:cs typeface="MS PGothic"/>
+              </a:defRPr>
+            </a:lvl4pPr>
           </a:lstStyle>
           <a:p>
             <a:r>
@@ -2711,6 +3464,39 @@
                 <a:cs typeface="MS PGothic"/>
               </a:defRPr>
             </a:lvl1pPr>
+            <a:lvl2pPr algn="l" marL="0" indent="0">
+              <a:buNone/>
+              <a:defRPr sz="1250" b="1">
+                <a:solidFill>
+                  <a:srgbClr val="000000"/>
+                </a:solidFill>
+                <a:latin typeface="MS PGothic"/>
+                <a:ea typeface="MS PGothic"/>
+                <a:cs typeface="MS PGothic"/>
+              </a:defRPr>
+            </a:lvl2pPr>
+            <a:lvl3pPr algn="l" marL="0" indent="0">
+              <a:buNone/>
+              <a:defRPr sz="1050" b="1">
+                <a:solidFill>
+                  <a:srgbClr val="000000"/>
+                </a:solidFill>
+                <a:latin typeface="MS PGothic"/>
+                <a:ea typeface="MS PGothic"/>
+                <a:cs typeface="MS PGothic"/>
+              </a:defRPr>
+            </a:lvl3pPr>
+            <a:lvl4pPr algn="l" marL="0" indent="0">
+              <a:buNone/>
+              <a:defRPr sz="900" b="1">
+                <a:solidFill>
+                  <a:srgbClr val="000000"/>
+                </a:solidFill>
+                <a:latin typeface="MS PGothic"/>
+                <a:ea typeface="MS PGothic"/>
+                <a:cs typeface="MS PGothic"/>
+              </a:defRPr>
+            </a:lvl4pPr>
           </a:lstStyle>
           <a:p>
             <a:r>
@@ -2794,6 +3580,39 @@
                 <a:cs typeface="MS PGothic"/>
               </a:defRPr>
             </a:lvl1pPr>
+            <a:lvl2pPr algn="ctr" marL="0" indent="0">
+              <a:buNone/>
+              <a:defRPr sz="1250" b="1">
+                <a:solidFill>
+                  <a:srgbClr val="FFFFFF"/>
+                </a:solidFill>
+                <a:latin typeface="MS PGothic"/>
+                <a:ea typeface="MS PGothic"/>
+                <a:cs typeface="MS PGothic"/>
+              </a:defRPr>
+            </a:lvl2pPr>
+            <a:lvl3pPr algn="ctr" marL="0" indent="0">
+              <a:buNone/>
+              <a:defRPr sz="1050" b="1">
+                <a:solidFill>
+                  <a:srgbClr val="FFFFFF"/>
+                </a:solidFill>
+                <a:latin typeface="MS PGothic"/>
+                <a:ea typeface="MS PGothic"/>
+                <a:cs typeface="MS PGothic"/>
+              </a:defRPr>
+            </a:lvl3pPr>
+            <a:lvl4pPr algn="ctr" marL="0" indent="0">
+              <a:buNone/>
+              <a:defRPr sz="900" b="1">
+                <a:solidFill>
+                  <a:srgbClr val="FFFFFF"/>
+                </a:solidFill>
+                <a:latin typeface="MS PGothic"/>
+                <a:ea typeface="MS PGothic"/>
+                <a:cs typeface="MS PGothic"/>
+              </a:defRPr>
+            </a:lvl4pPr>
           </a:lstStyle>
           <a:p>
             <a:r>
@@ -2833,6 +3652,39 @@
                 <a:cs typeface="MS PGothic"/>
               </a:defRPr>
             </a:lvl1pPr>
+            <a:lvl2pPr algn="l" marL="0" indent="0">
+              <a:buNone/>
+              <a:defRPr sz="1250" b="1">
+                <a:solidFill>
+                  <a:srgbClr val="000000"/>
+                </a:solidFill>
+                <a:latin typeface="MS PGothic"/>
+                <a:ea typeface="MS PGothic"/>
+                <a:cs typeface="MS PGothic"/>
+              </a:defRPr>
+            </a:lvl2pPr>
+            <a:lvl3pPr algn="l" marL="0" indent="0">
+              <a:buNone/>
+              <a:defRPr sz="1050" b="1">
+                <a:solidFill>
+                  <a:srgbClr val="000000"/>
+                </a:solidFill>
+                <a:latin typeface="MS PGothic"/>
+                <a:ea typeface="MS PGothic"/>
+                <a:cs typeface="MS PGothic"/>
+              </a:defRPr>
+            </a:lvl3pPr>
+            <a:lvl4pPr algn="l" marL="0" indent="0">
+              <a:buNone/>
+              <a:defRPr sz="900" b="1">
+                <a:solidFill>
+                  <a:srgbClr val="000000"/>
+                </a:solidFill>
+                <a:latin typeface="MS PGothic"/>
+                <a:ea typeface="MS PGothic"/>
+                <a:cs typeface="MS PGothic"/>
+              </a:defRPr>
+            </a:lvl4pPr>
           </a:lstStyle>
           <a:p>
             <a:r>
@@ -2894,6 +3746,39 @@
                 <a:cs typeface="MS PGothic"/>
               </a:defRPr>
             </a:lvl1pPr>
+            <a:lvl2pPr algn="r" marL="0" indent="0">
+              <a:buNone/>
+              <a:defRPr sz="800" b="0">
+                <a:solidFill>
+                  <a:srgbClr val="FFFFFF"/>
+                </a:solidFill>
+                <a:latin typeface="MS PGothic"/>
+                <a:ea typeface="MS PGothic"/>
+                <a:cs typeface="MS PGothic"/>
+              </a:defRPr>
+            </a:lvl2pPr>
+            <a:lvl3pPr algn="r" marL="0" indent="0">
+              <a:buNone/>
+              <a:defRPr sz="700" b="0">
+                <a:solidFill>
+                  <a:srgbClr val="FFFFFF"/>
+                </a:solidFill>
+                <a:latin typeface="MS PGothic"/>
+                <a:ea typeface="MS PGothic"/>
+                <a:cs typeface="MS PGothic"/>
+              </a:defRPr>
+            </a:lvl3pPr>
+            <a:lvl4pPr algn="r" marL="0" indent="0">
+              <a:buNone/>
+              <a:defRPr sz="550" b="0">
+                <a:solidFill>
+                  <a:srgbClr val="FFFFFF"/>
+                </a:solidFill>
+                <a:latin typeface="MS PGothic"/>
+                <a:ea typeface="MS PGothic"/>
+                <a:cs typeface="MS PGothic"/>
+              </a:defRPr>
+            </a:lvl4pPr>
           </a:lstStyle>
           <a:p>
             <a:r>
@@ -2933,6 +3818,39 @@
                 <a:cs typeface="MS PGothic"/>
               </a:defRPr>
             </a:lvl1pPr>
+            <a:lvl2pPr algn="l" marL="0" indent="0">
+              <a:buNone/>
+              <a:defRPr sz="750" b="0">
+                <a:solidFill>
+                  <a:srgbClr val="595959"/>
+                </a:solidFill>
+                <a:latin typeface="MS PGothic"/>
+                <a:ea typeface="MS PGothic"/>
+                <a:cs typeface="MS PGothic"/>
+              </a:defRPr>
+            </a:lvl2pPr>
+            <a:lvl3pPr algn="l" marL="0" indent="0">
+              <a:buNone/>
+              <a:defRPr sz="650" b="0">
+                <a:solidFill>
+                  <a:srgbClr val="595959"/>
+                </a:solidFill>
+                <a:latin typeface="MS PGothic"/>
+                <a:ea typeface="MS PGothic"/>
+                <a:cs typeface="MS PGothic"/>
+              </a:defRPr>
+            </a:lvl3pPr>
+            <a:lvl4pPr algn="l" marL="0" indent="0">
+              <a:buNone/>
+              <a:defRPr sz="550" b="0">
+                <a:solidFill>
+                  <a:srgbClr val="595959"/>
+                </a:solidFill>
+                <a:latin typeface="MS PGothic"/>
+                <a:ea typeface="MS PGothic"/>
+                <a:cs typeface="MS PGothic"/>
+              </a:defRPr>
+            </a:lvl4pPr>
           </a:lstStyle>
           <a:p>
             <a:r>
@@ -3358,6 +4276,39 @@
                 <a:cs typeface="MS PGothic"/>
               </a:defRPr>
             </a:lvl1pPr>
+            <a:lvl2pPr algn="ctr" marL="0" indent="0">
+              <a:buNone/>
+              <a:defRPr sz="1300" b="1">
+                <a:solidFill>
+                  <a:srgbClr val="000000"/>
+                </a:solidFill>
+                <a:latin typeface="MS PGothic"/>
+                <a:ea typeface="MS PGothic"/>
+                <a:cs typeface="MS PGothic"/>
+              </a:defRPr>
+            </a:lvl2pPr>
+            <a:lvl3pPr algn="ctr" marL="0" indent="0">
+              <a:buNone/>
+              <a:defRPr sz="1150" b="1">
+                <a:solidFill>
+                  <a:srgbClr val="000000"/>
+                </a:solidFill>
+                <a:latin typeface="MS PGothic"/>
+                <a:ea typeface="MS PGothic"/>
+                <a:cs typeface="MS PGothic"/>
+              </a:defRPr>
+            </a:lvl3pPr>
+            <a:lvl4pPr algn="ctr" marL="0" indent="0">
+              <a:buNone/>
+              <a:defRPr sz="950" b="1">
+                <a:solidFill>
+                  <a:srgbClr val="000000"/>
+                </a:solidFill>
+                <a:latin typeface="MS PGothic"/>
+                <a:ea typeface="MS PGothic"/>
+                <a:cs typeface="MS PGothic"/>
+              </a:defRPr>
+            </a:lvl4pPr>
           </a:lstStyle>
           <a:p>
             <a:r>
@@ -3397,6 +4348,39 @@
                 <a:cs typeface="MS PGothic"/>
               </a:defRPr>
             </a:lvl1pPr>
+            <a:lvl2pPr algn="ctr" marL="0" indent="0">
+              <a:buNone/>
+              <a:defRPr sz="900" b="0">
+                <a:solidFill>
+                  <a:srgbClr val="595959"/>
+                </a:solidFill>
+                <a:latin typeface="MS PGothic"/>
+                <a:ea typeface="MS PGothic"/>
+                <a:cs typeface="MS PGothic"/>
+              </a:defRPr>
+            </a:lvl2pPr>
+            <a:lvl3pPr algn="ctr" marL="0" indent="0">
+              <a:buNone/>
+              <a:defRPr sz="800" b="0">
+                <a:solidFill>
+                  <a:srgbClr val="595959"/>
+                </a:solidFill>
+                <a:latin typeface="MS PGothic"/>
+                <a:ea typeface="MS PGothic"/>
+                <a:cs typeface="MS PGothic"/>
+              </a:defRPr>
+            </a:lvl3pPr>
+            <a:lvl4pPr algn="ctr" marL="0" indent="0">
+              <a:buNone/>
+              <a:defRPr sz="650" b="0">
+                <a:solidFill>
+                  <a:srgbClr val="595959"/>
+                </a:solidFill>
+                <a:latin typeface="MS PGothic"/>
+                <a:ea typeface="MS PGothic"/>
+                <a:cs typeface="MS PGothic"/>
+              </a:defRPr>
+            </a:lvl4pPr>
           </a:lstStyle>
           <a:p>
             <a:r>
@@ -3436,6 +4420,39 @@
                 <a:cs typeface="MS PGothic"/>
               </a:defRPr>
             </a:lvl1pPr>
+            <a:lvl2pPr algn="ctr" marL="0" indent="0">
+              <a:buNone/>
+              <a:defRPr sz="1300" b="1">
+                <a:solidFill>
+                  <a:srgbClr val="000000"/>
+                </a:solidFill>
+                <a:latin typeface="MS PGothic"/>
+                <a:ea typeface="MS PGothic"/>
+                <a:cs typeface="MS PGothic"/>
+              </a:defRPr>
+            </a:lvl2pPr>
+            <a:lvl3pPr algn="ctr" marL="0" indent="0">
+              <a:buNone/>
+              <a:defRPr sz="1150" b="1">
+                <a:solidFill>
+                  <a:srgbClr val="000000"/>
+                </a:solidFill>
+                <a:latin typeface="MS PGothic"/>
+                <a:ea typeface="MS PGothic"/>
+                <a:cs typeface="MS PGothic"/>
+              </a:defRPr>
+            </a:lvl3pPr>
+            <a:lvl4pPr algn="ctr" marL="0" indent="0">
+              <a:buNone/>
+              <a:defRPr sz="950" b="1">
+                <a:solidFill>
+                  <a:srgbClr val="000000"/>
+                </a:solidFill>
+                <a:latin typeface="MS PGothic"/>
+                <a:ea typeface="MS PGothic"/>
+                <a:cs typeface="MS PGothic"/>
+              </a:defRPr>
+            </a:lvl4pPr>
           </a:lstStyle>
           <a:p>
             <a:r>
@@ -3475,6 +4492,39 @@
                 <a:cs typeface="MS PGothic"/>
               </a:defRPr>
             </a:lvl1pPr>
+            <a:lvl2pPr algn="ctr" marL="0" indent="0">
+              <a:buNone/>
+              <a:defRPr sz="900" b="0">
+                <a:solidFill>
+                  <a:srgbClr val="595959"/>
+                </a:solidFill>
+                <a:latin typeface="MS PGothic"/>
+                <a:ea typeface="MS PGothic"/>
+                <a:cs typeface="MS PGothic"/>
+              </a:defRPr>
+            </a:lvl2pPr>
+            <a:lvl3pPr algn="ctr" marL="0" indent="0">
+              <a:buNone/>
+              <a:defRPr sz="800" b="0">
+                <a:solidFill>
+                  <a:srgbClr val="595959"/>
+                </a:solidFill>
+                <a:latin typeface="MS PGothic"/>
+                <a:ea typeface="MS PGothic"/>
+                <a:cs typeface="MS PGothic"/>
+              </a:defRPr>
+            </a:lvl3pPr>
+            <a:lvl4pPr algn="ctr" marL="0" indent="0">
+              <a:buNone/>
+              <a:defRPr sz="650" b="0">
+                <a:solidFill>
+                  <a:srgbClr val="595959"/>
+                </a:solidFill>
+                <a:latin typeface="MS PGothic"/>
+                <a:ea typeface="MS PGothic"/>
+                <a:cs typeface="MS PGothic"/>
+              </a:defRPr>
+            </a:lvl4pPr>
           </a:lstStyle>
           <a:p>
             <a:r>
@@ -3514,6 +4564,39 @@
                 <a:cs typeface="MS PGothic"/>
               </a:defRPr>
             </a:lvl1pPr>
+            <a:lvl2pPr algn="ctr" marL="0" indent="0">
+              <a:buNone/>
+              <a:defRPr sz="1300" b="1">
+                <a:solidFill>
+                  <a:srgbClr val="000000"/>
+                </a:solidFill>
+                <a:latin typeface="MS PGothic"/>
+                <a:ea typeface="MS PGothic"/>
+                <a:cs typeface="MS PGothic"/>
+              </a:defRPr>
+            </a:lvl2pPr>
+            <a:lvl3pPr algn="ctr" marL="0" indent="0">
+              <a:buNone/>
+              <a:defRPr sz="1150" b="1">
+                <a:solidFill>
+                  <a:srgbClr val="000000"/>
+                </a:solidFill>
+                <a:latin typeface="MS PGothic"/>
+                <a:ea typeface="MS PGothic"/>
+                <a:cs typeface="MS PGothic"/>
+              </a:defRPr>
+            </a:lvl3pPr>
+            <a:lvl4pPr algn="ctr" marL="0" indent="0">
+              <a:buNone/>
+              <a:defRPr sz="950" b="1">
+                <a:solidFill>
+                  <a:srgbClr val="000000"/>
+                </a:solidFill>
+                <a:latin typeface="MS PGothic"/>
+                <a:ea typeface="MS PGothic"/>
+                <a:cs typeface="MS PGothic"/>
+              </a:defRPr>
+            </a:lvl4pPr>
           </a:lstStyle>
           <a:p>
             <a:r>
@@ -3553,6 +4636,39 @@
                 <a:cs typeface="MS PGothic"/>
               </a:defRPr>
             </a:lvl1pPr>
+            <a:lvl2pPr algn="ctr" marL="0" indent="0">
+              <a:buNone/>
+              <a:defRPr sz="900" b="0">
+                <a:solidFill>
+                  <a:srgbClr val="595959"/>
+                </a:solidFill>
+                <a:latin typeface="MS PGothic"/>
+                <a:ea typeface="MS PGothic"/>
+                <a:cs typeface="MS PGothic"/>
+              </a:defRPr>
+            </a:lvl2pPr>
+            <a:lvl3pPr algn="ctr" marL="0" indent="0">
+              <a:buNone/>
+              <a:defRPr sz="800" b="0">
+                <a:solidFill>
+                  <a:srgbClr val="595959"/>
+                </a:solidFill>
+                <a:latin typeface="MS PGothic"/>
+                <a:ea typeface="MS PGothic"/>
+                <a:cs typeface="MS PGothic"/>
+              </a:defRPr>
+            </a:lvl3pPr>
+            <a:lvl4pPr algn="ctr" marL="0" indent="0">
+              <a:buNone/>
+              <a:defRPr sz="650" b="0">
+                <a:solidFill>
+                  <a:srgbClr val="595959"/>
+                </a:solidFill>
+                <a:latin typeface="MS PGothic"/>
+                <a:ea typeface="MS PGothic"/>
+                <a:cs typeface="MS PGothic"/>
+              </a:defRPr>
+            </a:lvl4pPr>
           </a:lstStyle>
           <a:p>
             <a:r>
@@ -3592,6 +4708,39 @@
                 <a:cs typeface="MS PGothic"/>
               </a:defRPr>
             </a:lvl1pPr>
+            <a:lvl2pPr algn="ctr" marL="0" indent="0">
+              <a:buNone/>
+              <a:defRPr sz="1300" b="1">
+                <a:solidFill>
+                  <a:srgbClr val="000000"/>
+                </a:solidFill>
+                <a:latin typeface="MS PGothic"/>
+                <a:ea typeface="MS PGothic"/>
+                <a:cs typeface="MS PGothic"/>
+              </a:defRPr>
+            </a:lvl2pPr>
+            <a:lvl3pPr algn="ctr" marL="0" indent="0">
+              <a:buNone/>
+              <a:defRPr sz="1150" b="1">
+                <a:solidFill>
+                  <a:srgbClr val="000000"/>
+                </a:solidFill>
+                <a:latin typeface="MS PGothic"/>
+                <a:ea typeface="MS PGothic"/>
+                <a:cs typeface="MS PGothic"/>
+              </a:defRPr>
+            </a:lvl3pPr>
+            <a:lvl4pPr algn="ctr" marL="0" indent="0">
+              <a:buNone/>
+              <a:defRPr sz="950" b="1">
+                <a:solidFill>
+                  <a:srgbClr val="000000"/>
+                </a:solidFill>
+                <a:latin typeface="MS PGothic"/>
+                <a:ea typeface="MS PGothic"/>
+                <a:cs typeface="MS PGothic"/>
+              </a:defRPr>
+            </a:lvl4pPr>
           </a:lstStyle>
           <a:p>
             <a:r>
@@ -3631,6 +4780,39 @@
                 <a:cs typeface="MS PGothic"/>
               </a:defRPr>
             </a:lvl1pPr>
+            <a:lvl2pPr algn="ctr" marL="0" indent="0">
+              <a:buNone/>
+              <a:defRPr sz="900" b="0">
+                <a:solidFill>
+                  <a:srgbClr val="595959"/>
+                </a:solidFill>
+                <a:latin typeface="MS PGothic"/>
+                <a:ea typeface="MS PGothic"/>
+                <a:cs typeface="MS PGothic"/>
+              </a:defRPr>
+            </a:lvl2pPr>
+            <a:lvl3pPr algn="ctr" marL="0" indent="0">
+              <a:buNone/>
+              <a:defRPr sz="800" b="0">
+                <a:solidFill>
+                  <a:srgbClr val="595959"/>
+                </a:solidFill>
+                <a:latin typeface="MS PGothic"/>
+                <a:ea typeface="MS PGothic"/>
+                <a:cs typeface="MS PGothic"/>
+              </a:defRPr>
+            </a:lvl3pPr>
+            <a:lvl4pPr algn="ctr" marL="0" indent="0">
+              <a:buNone/>
+              <a:defRPr sz="650" b="0">
+                <a:solidFill>
+                  <a:srgbClr val="595959"/>
+                </a:solidFill>
+                <a:latin typeface="MS PGothic"/>
+                <a:ea typeface="MS PGothic"/>
+                <a:cs typeface="MS PGothic"/>
+              </a:defRPr>
+            </a:lvl4pPr>
           </a:lstStyle>
           <a:p>
             <a:r>
@@ -3713,6 +4895,39 @@
                 <a:cs typeface="MS PGothic"/>
               </a:defRPr>
             </a:lvl1pPr>
+            <a:lvl2pPr algn="ctr" marL="0" indent="0">
+              <a:buNone/>
+              <a:defRPr sz="950" b="1">
+                <a:solidFill>
+                  <a:srgbClr val="FFFFFF"/>
+                </a:solidFill>
+                <a:latin typeface="MS PGothic"/>
+                <a:ea typeface="MS PGothic"/>
+                <a:cs typeface="MS PGothic"/>
+              </a:defRPr>
+            </a:lvl2pPr>
+            <a:lvl3pPr algn="ctr" marL="0" indent="0">
+              <a:buNone/>
+              <a:defRPr sz="850" b="1">
+                <a:solidFill>
+                  <a:srgbClr val="FFFFFF"/>
+                </a:solidFill>
+                <a:latin typeface="MS PGothic"/>
+                <a:ea typeface="MS PGothic"/>
+                <a:cs typeface="MS PGothic"/>
+              </a:defRPr>
+            </a:lvl3pPr>
+            <a:lvl4pPr algn="ctr" marL="0" indent="0">
+              <a:buNone/>
+              <a:defRPr sz="700" b="1">
+                <a:solidFill>
+                  <a:srgbClr val="FFFFFF"/>
+                </a:solidFill>
+                <a:latin typeface="MS PGothic"/>
+                <a:ea typeface="MS PGothic"/>
+                <a:cs typeface="MS PGothic"/>
+              </a:defRPr>
+            </a:lvl4pPr>
           </a:lstStyle>
           <a:p>
             <a:r>
@@ -3774,6 +4989,39 @@
                 <a:cs typeface="MS PGothic"/>
               </a:defRPr>
             </a:lvl1pPr>
+            <a:lvl2pPr algn="ctr" marL="0" indent="0">
+              <a:buNone/>
+              <a:defRPr sz="950" b="1">
+                <a:solidFill>
+                  <a:srgbClr val="FFFFFF"/>
+                </a:solidFill>
+                <a:latin typeface="MS PGothic"/>
+                <a:ea typeface="MS PGothic"/>
+                <a:cs typeface="MS PGothic"/>
+              </a:defRPr>
+            </a:lvl2pPr>
+            <a:lvl3pPr algn="ctr" marL="0" indent="0">
+              <a:buNone/>
+              <a:defRPr sz="850" b="1">
+                <a:solidFill>
+                  <a:srgbClr val="FFFFFF"/>
+                </a:solidFill>
+                <a:latin typeface="MS PGothic"/>
+                <a:ea typeface="MS PGothic"/>
+                <a:cs typeface="MS PGothic"/>
+              </a:defRPr>
+            </a:lvl3pPr>
+            <a:lvl4pPr algn="ctr" marL="0" indent="0">
+              <a:buNone/>
+              <a:defRPr sz="700" b="1">
+                <a:solidFill>
+                  <a:srgbClr val="FFFFFF"/>
+                </a:solidFill>
+                <a:latin typeface="MS PGothic"/>
+                <a:ea typeface="MS PGothic"/>
+                <a:cs typeface="MS PGothic"/>
+              </a:defRPr>
+            </a:lvl4pPr>
           </a:lstStyle>
           <a:p>
             <a:r>
@@ -3835,6 +5083,39 @@
                 <a:cs typeface="MS PGothic"/>
               </a:defRPr>
             </a:lvl1pPr>
+            <a:lvl2pPr algn="ctr" marL="0" indent="0">
+              <a:buNone/>
+              <a:defRPr sz="950" b="1">
+                <a:solidFill>
+                  <a:srgbClr val="FFFFFF"/>
+                </a:solidFill>
+                <a:latin typeface="MS PGothic"/>
+                <a:ea typeface="MS PGothic"/>
+                <a:cs typeface="MS PGothic"/>
+              </a:defRPr>
+            </a:lvl2pPr>
+            <a:lvl3pPr algn="ctr" marL="0" indent="0">
+              <a:buNone/>
+              <a:defRPr sz="850" b="1">
+                <a:solidFill>
+                  <a:srgbClr val="FFFFFF"/>
+                </a:solidFill>
+                <a:latin typeface="MS PGothic"/>
+                <a:ea typeface="MS PGothic"/>
+                <a:cs typeface="MS PGothic"/>
+              </a:defRPr>
+            </a:lvl3pPr>
+            <a:lvl4pPr algn="ctr" marL="0" indent="0">
+              <a:buNone/>
+              <a:defRPr sz="700" b="1">
+                <a:solidFill>
+                  <a:srgbClr val="FFFFFF"/>
+                </a:solidFill>
+                <a:latin typeface="MS PGothic"/>
+                <a:ea typeface="MS PGothic"/>
+                <a:cs typeface="MS PGothic"/>
+              </a:defRPr>
+            </a:lvl4pPr>
           </a:lstStyle>
           <a:p>
             <a:r>
@@ -3896,6 +5177,39 @@
                 <a:cs typeface="MS PGothic"/>
               </a:defRPr>
             </a:lvl1pPr>
+            <a:lvl2pPr algn="ctr" marL="0" indent="0">
+              <a:buNone/>
+              <a:defRPr sz="950" b="1">
+                <a:solidFill>
+                  <a:srgbClr val="FFFFFF"/>
+                </a:solidFill>
+                <a:latin typeface="MS PGothic"/>
+                <a:ea typeface="MS PGothic"/>
+                <a:cs typeface="MS PGothic"/>
+              </a:defRPr>
+            </a:lvl2pPr>
+            <a:lvl3pPr algn="ctr" marL="0" indent="0">
+              <a:buNone/>
+              <a:defRPr sz="850" b="1">
+                <a:solidFill>
+                  <a:srgbClr val="FFFFFF"/>
+                </a:solidFill>
+                <a:latin typeface="MS PGothic"/>
+                <a:ea typeface="MS PGothic"/>
+                <a:cs typeface="MS PGothic"/>
+              </a:defRPr>
+            </a:lvl3pPr>
+            <a:lvl4pPr algn="ctr" marL="0" indent="0">
+              <a:buNone/>
+              <a:defRPr sz="700" b="1">
+                <a:solidFill>
+                  <a:srgbClr val="FFFFFF"/>
+                </a:solidFill>
+                <a:latin typeface="MS PGothic"/>
+                <a:ea typeface="MS PGothic"/>
+                <a:cs typeface="MS PGothic"/>
+              </a:defRPr>
+            </a:lvl4pPr>
           </a:lstStyle>
           <a:p>
             <a:r>
@@ -3935,6 +5249,39 @@
                 <a:cs typeface="MS PGothic"/>
               </a:defRPr>
             </a:lvl1pPr>
+            <a:lvl2pPr algn="r" marL="0" indent="0">
+              <a:buNone/>
+              <a:defRPr sz="800" b="0">
+                <a:solidFill>
+                  <a:srgbClr val="FFFFFF"/>
+                </a:solidFill>
+                <a:latin typeface="MS PGothic"/>
+                <a:ea typeface="MS PGothic"/>
+                <a:cs typeface="MS PGothic"/>
+              </a:defRPr>
+            </a:lvl2pPr>
+            <a:lvl3pPr algn="r" marL="0" indent="0">
+              <a:buNone/>
+              <a:defRPr sz="700" b="0">
+                <a:solidFill>
+                  <a:srgbClr val="FFFFFF"/>
+                </a:solidFill>
+                <a:latin typeface="MS PGothic"/>
+                <a:ea typeface="MS PGothic"/>
+                <a:cs typeface="MS PGothic"/>
+              </a:defRPr>
+            </a:lvl3pPr>
+            <a:lvl4pPr algn="r" marL="0" indent="0">
+              <a:buNone/>
+              <a:defRPr sz="550" b="0">
+                <a:solidFill>
+                  <a:srgbClr val="FFFFFF"/>
+                </a:solidFill>
+                <a:latin typeface="MS PGothic"/>
+                <a:ea typeface="MS PGothic"/>
+                <a:cs typeface="MS PGothic"/>
+              </a:defRPr>
+            </a:lvl4pPr>
           </a:lstStyle>
           <a:p>
             <a:r>
@@ -3974,6 +5321,39 @@
                 <a:cs typeface="MS PGothic"/>
               </a:defRPr>
             </a:lvl1pPr>
+            <a:lvl2pPr algn="l" marL="0" indent="0">
+              <a:buNone/>
+              <a:defRPr sz="750" b="0">
+                <a:solidFill>
+                  <a:srgbClr val="595959"/>
+                </a:solidFill>
+                <a:latin typeface="MS PGothic"/>
+                <a:ea typeface="MS PGothic"/>
+                <a:cs typeface="MS PGothic"/>
+              </a:defRPr>
+            </a:lvl2pPr>
+            <a:lvl3pPr algn="l" marL="0" indent="0">
+              <a:buNone/>
+              <a:defRPr sz="650" b="0">
+                <a:solidFill>
+                  <a:srgbClr val="595959"/>
+                </a:solidFill>
+                <a:latin typeface="MS PGothic"/>
+                <a:ea typeface="MS PGothic"/>
+                <a:cs typeface="MS PGothic"/>
+              </a:defRPr>
+            </a:lvl3pPr>
+            <a:lvl4pPr algn="l" marL="0" indent="0">
+              <a:buNone/>
+              <a:defRPr sz="550" b="0">
+                <a:solidFill>
+                  <a:srgbClr val="595959"/>
+                </a:solidFill>
+                <a:latin typeface="MS PGothic"/>
+                <a:ea typeface="MS PGothic"/>
+                <a:cs typeface="MS PGothic"/>
+              </a:defRPr>
+            </a:lvl4pPr>
           </a:lstStyle>
           <a:p>
             <a:r>
@@ -4351,6 +5731,39 @@
                 <a:cs typeface="MS PGothic"/>
               </a:defRPr>
             </a:lvl1pPr>
+            <a:lvl2pPr algn="l" marL="0" indent="0">
+              <a:buNone/>
+              <a:defRPr sz="1050" b="1">
+                <a:solidFill>
+                  <a:srgbClr val="FFFFFF"/>
+                </a:solidFill>
+                <a:latin typeface="MS PGothic"/>
+                <a:ea typeface="MS PGothic"/>
+                <a:cs typeface="MS PGothic"/>
+              </a:defRPr>
+            </a:lvl2pPr>
+            <a:lvl3pPr algn="l" marL="0" indent="0">
+              <a:buNone/>
+              <a:defRPr sz="900" b="1">
+                <a:solidFill>
+                  <a:srgbClr val="FFFFFF"/>
+                </a:solidFill>
+                <a:latin typeface="MS PGothic"/>
+                <a:ea typeface="MS PGothic"/>
+                <a:cs typeface="MS PGothic"/>
+              </a:defRPr>
+            </a:lvl3pPr>
+            <a:lvl4pPr algn="l" marL="0" indent="0">
+              <a:buNone/>
+              <a:defRPr sz="750" b="1">
+                <a:solidFill>
+                  <a:srgbClr val="FFFFFF"/>
+                </a:solidFill>
+                <a:latin typeface="MS PGothic"/>
+                <a:ea typeface="MS PGothic"/>
+                <a:cs typeface="MS PGothic"/>
+              </a:defRPr>
+            </a:lvl4pPr>
           </a:lstStyle>
           <a:p>
             <a:r>
@@ -4390,6 +5803,39 @@
                 <a:cs typeface="MS PGothic"/>
               </a:defRPr>
             </a:lvl1pPr>
+            <a:lvl2pPr algn="l" marL="0" indent="0">
+              <a:buNone/>
+              <a:defRPr sz="900" b="0">
+                <a:solidFill>
+                  <a:srgbClr val="1A1A1A"/>
+                </a:solidFill>
+                <a:latin typeface="MS PGothic"/>
+                <a:ea typeface="MS PGothic"/>
+                <a:cs typeface="MS PGothic"/>
+              </a:defRPr>
+            </a:lvl2pPr>
+            <a:lvl3pPr algn="l" marL="0" indent="0">
+              <a:buNone/>
+              <a:defRPr sz="800" b="0">
+                <a:solidFill>
+                  <a:srgbClr val="1A1A1A"/>
+                </a:solidFill>
+                <a:latin typeface="MS PGothic"/>
+                <a:ea typeface="MS PGothic"/>
+                <a:cs typeface="MS PGothic"/>
+              </a:defRPr>
+            </a:lvl3pPr>
+            <a:lvl4pPr algn="l" marL="0" indent="0">
+              <a:buNone/>
+              <a:defRPr sz="650" b="0">
+                <a:solidFill>
+                  <a:srgbClr val="1A1A1A"/>
+                </a:solidFill>
+                <a:latin typeface="MS PGothic"/>
+                <a:ea typeface="MS PGothic"/>
+                <a:cs typeface="MS PGothic"/>
+              </a:defRPr>
+            </a:lvl4pPr>
           </a:lstStyle>
           <a:p>
             <a:r>
@@ -4429,6 +5875,39 @@
                 <a:cs typeface="MS PGothic"/>
               </a:defRPr>
             </a:lvl1pPr>
+            <a:lvl2pPr algn="l" marL="0" indent="0">
+              <a:buNone/>
+              <a:defRPr sz="1050" b="1">
+                <a:solidFill>
+                  <a:srgbClr val="FFFFFF"/>
+                </a:solidFill>
+                <a:latin typeface="MS PGothic"/>
+                <a:ea typeface="MS PGothic"/>
+                <a:cs typeface="MS PGothic"/>
+              </a:defRPr>
+            </a:lvl2pPr>
+            <a:lvl3pPr algn="l" marL="0" indent="0">
+              <a:buNone/>
+              <a:defRPr sz="900" b="1">
+                <a:solidFill>
+                  <a:srgbClr val="FFFFFF"/>
+                </a:solidFill>
+                <a:latin typeface="MS PGothic"/>
+                <a:ea typeface="MS PGothic"/>
+                <a:cs typeface="MS PGothic"/>
+              </a:defRPr>
+            </a:lvl3pPr>
+            <a:lvl4pPr algn="l" marL="0" indent="0">
+              <a:buNone/>
+              <a:defRPr sz="750" b="1">
+                <a:solidFill>
+                  <a:srgbClr val="FFFFFF"/>
+                </a:solidFill>
+                <a:latin typeface="MS PGothic"/>
+                <a:ea typeface="MS PGothic"/>
+                <a:cs typeface="MS PGothic"/>
+              </a:defRPr>
+            </a:lvl4pPr>
           </a:lstStyle>
           <a:p>
             <a:r>
@@ -4468,6 +5947,39 @@
                 <a:cs typeface="MS PGothic"/>
               </a:defRPr>
             </a:lvl1pPr>
+            <a:lvl2pPr algn="l" marL="0" indent="0">
+              <a:buNone/>
+              <a:defRPr sz="900" b="0">
+                <a:solidFill>
+                  <a:srgbClr val="1A1A1A"/>
+                </a:solidFill>
+                <a:latin typeface="MS PGothic"/>
+                <a:ea typeface="MS PGothic"/>
+                <a:cs typeface="MS PGothic"/>
+              </a:defRPr>
+            </a:lvl2pPr>
+            <a:lvl3pPr algn="l" marL="0" indent="0">
+              <a:buNone/>
+              <a:defRPr sz="800" b="0">
+                <a:solidFill>
+                  <a:srgbClr val="1A1A1A"/>
+                </a:solidFill>
+                <a:latin typeface="MS PGothic"/>
+                <a:ea typeface="MS PGothic"/>
+                <a:cs typeface="MS PGothic"/>
+              </a:defRPr>
+            </a:lvl3pPr>
+            <a:lvl4pPr algn="l" marL="0" indent="0">
+              <a:buNone/>
+              <a:defRPr sz="650" b="0">
+                <a:solidFill>
+                  <a:srgbClr val="1A1A1A"/>
+                </a:solidFill>
+                <a:latin typeface="MS PGothic"/>
+                <a:ea typeface="MS PGothic"/>
+                <a:cs typeface="MS PGothic"/>
+              </a:defRPr>
+            </a:lvl4pPr>
           </a:lstStyle>
           <a:p>
             <a:r>
@@ -4528,6 +6040,39 @@
                 <a:cs typeface="MS PGothic"/>
               </a:defRPr>
             </a:lvl1pPr>
+            <a:lvl2pPr algn="r" marL="0" indent="0">
+              <a:buNone/>
+              <a:defRPr sz="800" b="0">
+                <a:solidFill>
+                  <a:srgbClr val="FFFFFF"/>
+                </a:solidFill>
+                <a:latin typeface="MS PGothic"/>
+                <a:ea typeface="MS PGothic"/>
+                <a:cs typeface="MS PGothic"/>
+              </a:defRPr>
+            </a:lvl2pPr>
+            <a:lvl3pPr algn="r" marL="0" indent="0">
+              <a:buNone/>
+              <a:defRPr sz="700" b="0">
+                <a:solidFill>
+                  <a:srgbClr val="FFFFFF"/>
+                </a:solidFill>
+                <a:latin typeface="MS PGothic"/>
+                <a:ea typeface="MS PGothic"/>
+                <a:cs typeface="MS PGothic"/>
+              </a:defRPr>
+            </a:lvl3pPr>
+            <a:lvl4pPr algn="r" marL="0" indent="0">
+              <a:buNone/>
+              <a:defRPr sz="550" b="0">
+                <a:solidFill>
+                  <a:srgbClr val="FFFFFF"/>
+                </a:solidFill>
+                <a:latin typeface="MS PGothic"/>
+                <a:ea typeface="MS PGothic"/>
+                <a:cs typeface="MS PGothic"/>
+              </a:defRPr>
+            </a:lvl4pPr>
           </a:lstStyle>
           <a:p>
             <a:r>
@@ -4567,6 +6112,39 @@
                 <a:cs typeface="MS PGothic"/>
               </a:defRPr>
             </a:lvl1pPr>
+            <a:lvl2pPr algn="l" marL="0" indent="0">
+              <a:buNone/>
+              <a:defRPr sz="750" b="0">
+                <a:solidFill>
+                  <a:srgbClr val="595959"/>
+                </a:solidFill>
+                <a:latin typeface="MS PGothic"/>
+                <a:ea typeface="MS PGothic"/>
+                <a:cs typeface="MS PGothic"/>
+              </a:defRPr>
+            </a:lvl2pPr>
+            <a:lvl3pPr algn="l" marL="0" indent="0">
+              <a:buNone/>
+              <a:defRPr sz="650" b="0">
+                <a:solidFill>
+                  <a:srgbClr val="595959"/>
+                </a:solidFill>
+                <a:latin typeface="MS PGothic"/>
+                <a:ea typeface="MS PGothic"/>
+                <a:cs typeface="MS PGothic"/>
+              </a:defRPr>
+            </a:lvl3pPr>
+            <a:lvl4pPr algn="l" marL="0" indent="0">
+              <a:buNone/>
+              <a:defRPr sz="550" b="0">
+                <a:solidFill>
+                  <a:srgbClr val="595959"/>
+                </a:solidFill>
+                <a:latin typeface="MS PGothic"/>
+                <a:ea typeface="MS PGothic"/>
+                <a:cs typeface="MS PGothic"/>
+              </a:defRPr>
+            </a:lvl4pPr>
           </a:lstStyle>
           <a:p>
             <a:r>
@@ -4809,6 +6387,39 @@
                 <a:cs typeface="MS PGothic"/>
               </a:defRPr>
             </a:lvl1pPr>
+            <a:lvl2pPr algn="r" marL="0" indent="0">
+              <a:buNone/>
+              <a:defRPr sz="800" b="0">
+                <a:solidFill>
+                  <a:srgbClr val="FFFFFF"/>
+                </a:solidFill>
+                <a:latin typeface="MS PGothic"/>
+                <a:ea typeface="MS PGothic"/>
+                <a:cs typeface="MS PGothic"/>
+              </a:defRPr>
+            </a:lvl2pPr>
+            <a:lvl3pPr algn="r" marL="0" indent="0">
+              <a:buNone/>
+              <a:defRPr sz="700" b="0">
+                <a:solidFill>
+                  <a:srgbClr val="FFFFFF"/>
+                </a:solidFill>
+                <a:latin typeface="MS PGothic"/>
+                <a:ea typeface="MS PGothic"/>
+                <a:cs typeface="MS PGothic"/>
+              </a:defRPr>
+            </a:lvl3pPr>
+            <a:lvl4pPr algn="r" marL="0" indent="0">
+              <a:buNone/>
+              <a:defRPr sz="550" b="0">
+                <a:solidFill>
+                  <a:srgbClr val="FFFFFF"/>
+                </a:solidFill>
+                <a:latin typeface="MS PGothic"/>
+                <a:ea typeface="MS PGothic"/>
+                <a:cs typeface="MS PGothic"/>
+              </a:defRPr>
+            </a:lvl4pPr>
           </a:lstStyle>
           <a:p>
             <a:r>
@@ -4848,6 +6459,39 @@
                 <a:cs typeface="MS PGothic"/>
               </a:defRPr>
             </a:lvl1pPr>
+            <a:lvl2pPr algn="l" marL="0" indent="0">
+              <a:buNone/>
+              <a:defRPr sz="750" b="0">
+                <a:solidFill>
+                  <a:srgbClr val="595959"/>
+                </a:solidFill>
+                <a:latin typeface="MS PGothic"/>
+                <a:ea typeface="MS PGothic"/>
+                <a:cs typeface="MS PGothic"/>
+              </a:defRPr>
+            </a:lvl2pPr>
+            <a:lvl3pPr algn="l" marL="0" indent="0">
+              <a:buNone/>
+              <a:defRPr sz="650" b="0">
+                <a:solidFill>
+                  <a:srgbClr val="595959"/>
+                </a:solidFill>
+                <a:latin typeface="MS PGothic"/>
+                <a:ea typeface="MS PGothic"/>
+                <a:cs typeface="MS PGothic"/>
+              </a:defRPr>
+            </a:lvl3pPr>
+            <a:lvl4pPr algn="l" marL="0" indent="0">
+              <a:buNone/>
+              <a:defRPr sz="550" b="0">
+                <a:solidFill>
+                  <a:srgbClr val="595959"/>
+                </a:solidFill>
+                <a:latin typeface="MS PGothic"/>
+                <a:ea typeface="MS PGothic"/>
+                <a:cs typeface="MS PGothic"/>
+              </a:defRPr>
+            </a:lvl4pPr>
           </a:lstStyle>
           <a:p>
             <a:r>
@@ -4909,6 +6553,39 @@
                 <a:cs typeface="MS PGothic"/>
               </a:defRPr>
             </a:lvl1pPr>
+            <a:lvl2pPr algn="l" marL="0" indent="0">
+              <a:buNone/>
+              <a:defRPr sz="1050" b="1">
+                <a:solidFill>
+                  <a:srgbClr val="1F3864"/>
+                </a:solidFill>
+                <a:latin typeface="MS PGothic"/>
+                <a:ea typeface="MS PGothic"/>
+                <a:cs typeface="MS PGothic"/>
+              </a:defRPr>
+            </a:lvl2pPr>
+            <a:lvl3pPr algn="l" marL="0" indent="0">
+              <a:buNone/>
+              <a:defRPr sz="900" b="1">
+                <a:solidFill>
+                  <a:srgbClr val="1F3864"/>
+                </a:solidFill>
+                <a:latin typeface="MS PGothic"/>
+                <a:ea typeface="MS PGothic"/>
+                <a:cs typeface="MS PGothic"/>
+              </a:defRPr>
+            </a:lvl3pPr>
+            <a:lvl4pPr algn="l" marL="0" indent="0">
+              <a:buNone/>
+              <a:defRPr sz="750" b="1">
+                <a:solidFill>
+                  <a:srgbClr val="1F3864"/>
+                </a:solidFill>
+                <a:latin typeface="MS PGothic"/>
+                <a:ea typeface="MS PGothic"/>
+                <a:cs typeface="MS PGothic"/>
+              </a:defRPr>
+            </a:lvl4pPr>
           </a:lstStyle>
           <a:p>
             <a:r>
@@ -4948,6 +6625,39 @@
                 <a:cs typeface="MS PGothic"/>
               </a:defRPr>
             </a:lvl1pPr>
+            <a:lvl2pPr algn="l" marL="0" indent="0">
+              <a:buNone/>
+              <a:defRPr sz="900" b="0">
+                <a:solidFill>
+                  <a:srgbClr val="000000"/>
+                </a:solidFill>
+                <a:latin typeface="MS PGothic"/>
+                <a:ea typeface="MS PGothic"/>
+                <a:cs typeface="MS PGothic"/>
+              </a:defRPr>
+            </a:lvl2pPr>
+            <a:lvl3pPr algn="l" marL="0" indent="0">
+              <a:buNone/>
+              <a:defRPr sz="800" b="0">
+                <a:solidFill>
+                  <a:srgbClr val="000000"/>
+                </a:solidFill>
+                <a:latin typeface="MS PGothic"/>
+                <a:ea typeface="MS PGothic"/>
+                <a:cs typeface="MS PGothic"/>
+              </a:defRPr>
+            </a:lvl3pPr>
+            <a:lvl4pPr algn="l" marL="0" indent="0">
+              <a:buNone/>
+              <a:defRPr sz="650" b="0">
+                <a:solidFill>
+                  <a:srgbClr val="000000"/>
+                </a:solidFill>
+                <a:latin typeface="MS PGothic"/>
+                <a:ea typeface="MS PGothic"/>
+                <a:cs typeface="MS PGothic"/>
+              </a:defRPr>
+            </a:lvl4pPr>
           </a:lstStyle>
           <a:p>
             <a:r>
@@ -5009,6 +6719,39 @@
                 <a:cs typeface="MS PGothic"/>
               </a:defRPr>
             </a:lvl1pPr>
+            <a:lvl2pPr algn="l" marL="0" indent="0">
+              <a:buNone/>
+              <a:defRPr sz="1050" b="1">
+                <a:solidFill>
+                  <a:srgbClr val="1F3864"/>
+                </a:solidFill>
+                <a:latin typeface="MS PGothic"/>
+                <a:ea typeface="MS PGothic"/>
+                <a:cs typeface="MS PGothic"/>
+              </a:defRPr>
+            </a:lvl2pPr>
+            <a:lvl3pPr algn="l" marL="0" indent="0">
+              <a:buNone/>
+              <a:defRPr sz="900" b="1">
+                <a:solidFill>
+                  <a:srgbClr val="1F3864"/>
+                </a:solidFill>
+                <a:latin typeface="MS PGothic"/>
+                <a:ea typeface="MS PGothic"/>
+                <a:cs typeface="MS PGothic"/>
+              </a:defRPr>
+            </a:lvl3pPr>
+            <a:lvl4pPr algn="l" marL="0" indent="0">
+              <a:buNone/>
+              <a:defRPr sz="750" b="1">
+                <a:solidFill>
+                  <a:srgbClr val="1F3864"/>
+                </a:solidFill>
+                <a:latin typeface="MS PGothic"/>
+                <a:ea typeface="MS PGothic"/>
+                <a:cs typeface="MS PGothic"/>
+              </a:defRPr>
+            </a:lvl4pPr>
           </a:lstStyle>
           <a:p>
             <a:r>
@@ -5048,6 +6791,39 @@
                 <a:cs typeface="MS PGothic"/>
               </a:defRPr>
             </a:lvl1pPr>
+            <a:lvl2pPr algn="l" marL="0" indent="0">
+              <a:buNone/>
+              <a:defRPr sz="900" b="0">
+                <a:solidFill>
+                  <a:srgbClr val="000000"/>
+                </a:solidFill>
+                <a:latin typeface="MS PGothic"/>
+                <a:ea typeface="MS PGothic"/>
+                <a:cs typeface="MS PGothic"/>
+              </a:defRPr>
+            </a:lvl2pPr>
+            <a:lvl3pPr algn="l" marL="0" indent="0">
+              <a:buNone/>
+              <a:defRPr sz="800" b="0">
+                <a:solidFill>
+                  <a:srgbClr val="000000"/>
+                </a:solidFill>
+                <a:latin typeface="MS PGothic"/>
+                <a:ea typeface="MS PGothic"/>
+                <a:cs typeface="MS PGothic"/>
+              </a:defRPr>
+            </a:lvl3pPr>
+            <a:lvl4pPr algn="l" marL="0" indent="0">
+              <a:buNone/>
+              <a:defRPr sz="650" b="0">
+                <a:solidFill>
+                  <a:srgbClr val="000000"/>
+                </a:solidFill>
+                <a:latin typeface="MS PGothic"/>
+                <a:ea typeface="MS PGothic"/>
+                <a:cs typeface="MS PGothic"/>
+              </a:defRPr>
+            </a:lvl4pPr>
           </a:lstStyle>
           <a:p>
             <a:r>
@@ -5109,6 +6885,39 @@
                 <a:cs typeface="MS PGothic"/>
               </a:defRPr>
             </a:lvl1pPr>
+            <a:lvl2pPr algn="l" marL="0" indent="0">
+              <a:buNone/>
+              <a:defRPr sz="1050" b="1">
+                <a:solidFill>
+                  <a:srgbClr val="1F3864"/>
+                </a:solidFill>
+                <a:latin typeface="MS PGothic"/>
+                <a:ea typeface="MS PGothic"/>
+                <a:cs typeface="MS PGothic"/>
+              </a:defRPr>
+            </a:lvl2pPr>
+            <a:lvl3pPr algn="l" marL="0" indent="0">
+              <a:buNone/>
+              <a:defRPr sz="900" b="1">
+                <a:solidFill>
+                  <a:srgbClr val="1F3864"/>
+                </a:solidFill>
+                <a:latin typeface="MS PGothic"/>
+                <a:ea typeface="MS PGothic"/>
+                <a:cs typeface="MS PGothic"/>
+              </a:defRPr>
+            </a:lvl3pPr>
+            <a:lvl4pPr algn="l" marL="0" indent="0">
+              <a:buNone/>
+              <a:defRPr sz="750" b="1">
+                <a:solidFill>
+                  <a:srgbClr val="1F3864"/>
+                </a:solidFill>
+                <a:latin typeface="MS PGothic"/>
+                <a:ea typeface="MS PGothic"/>
+                <a:cs typeface="MS PGothic"/>
+              </a:defRPr>
+            </a:lvl4pPr>
           </a:lstStyle>
           <a:p>
             <a:r>
@@ -5148,6 +6957,39 @@
                 <a:cs typeface="MS PGothic"/>
               </a:defRPr>
             </a:lvl1pPr>
+            <a:lvl2pPr algn="l" marL="0" indent="0">
+              <a:buNone/>
+              <a:defRPr sz="900" b="0">
+                <a:solidFill>
+                  <a:srgbClr val="000000"/>
+                </a:solidFill>
+                <a:latin typeface="MS PGothic"/>
+                <a:ea typeface="MS PGothic"/>
+                <a:cs typeface="MS PGothic"/>
+              </a:defRPr>
+            </a:lvl2pPr>
+            <a:lvl3pPr algn="l" marL="0" indent="0">
+              <a:buNone/>
+              <a:defRPr sz="800" b="0">
+                <a:solidFill>
+                  <a:srgbClr val="000000"/>
+                </a:solidFill>
+                <a:latin typeface="MS PGothic"/>
+                <a:ea typeface="MS PGothic"/>
+                <a:cs typeface="MS PGothic"/>
+              </a:defRPr>
+            </a:lvl3pPr>
+            <a:lvl4pPr algn="l" marL="0" indent="0">
+              <a:buNone/>
+              <a:defRPr sz="650" b="0">
+                <a:solidFill>
+                  <a:srgbClr val="000000"/>
+                </a:solidFill>
+                <a:latin typeface="MS PGothic"/>
+                <a:ea typeface="MS PGothic"/>
+                <a:cs typeface="MS PGothic"/>
+              </a:defRPr>
+            </a:lvl4pPr>
           </a:lstStyle>
           <a:p>
             <a:r>
@@ -5592,28 +7434,28 @@
           <a:bodyPr anchor="t"/>
           <a:lstStyle>
             <a:lvl2pPr>
-              <a:defRPr sz="2400"/>
+              <a:defRPr sz="850"/>
             </a:lvl2pPr>
             <a:lvl3pPr>
-              <a:defRPr sz="2000"/>
+              <a:defRPr sz="700"/>
             </a:lvl3pPr>
             <a:lvl4pPr>
-              <a:defRPr sz="1800"/>
+              <a:defRPr sz="600"/>
             </a:lvl4pPr>
             <a:lvl5pPr>
-              <a:defRPr sz="1800"/>
+              <a:defRPr sz="600"/>
             </a:lvl5pPr>
             <a:lvl6pPr>
-              <a:defRPr sz="1800"/>
+              <a:defRPr sz="600"/>
             </a:lvl6pPr>
             <a:lvl7pPr>
-              <a:defRPr sz="1800"/>
+              <a:defRPr sz="600"/>
             </a:lvl7pPr>
             <a:lvl8pPr>
-              <a:defRPr sz="1800"/>
+              <a:defRPr sz="600"/>
             </a:lvl8pPr>
             <a:lvl9pPr>
-              <a:defRPr sz="1800"/>
+              <a:defRPr sz="600"/>
             </a:lvl9pPr>
             <a:lvl1pPr algn="l">
               <a:defRPr sz="1100" b="1">
@@ -5681,28 +7523,28 @@
           <a:bodyPr anchor="t"/>
           <a:lstStyle>
             <a:lvl2pPr>
-              <a:defRPr sz="2400"/>
+              <a:defRPr sz="800"/>
             </a:lvl2pPr>
             <a:lvl3pPr>
-              <a:defRPr sz="2000"/>
+              <a:defRPr sz="650"/>
             </a:lvl3pPr>
             <a:lvl4pPr>
-              <a:defRPr sz="1800"/>
+              <a:defRPr sz="600"/>
             </a:lvl4pPr>
             <a:lvl5pPr>
-              <a:defRPr sz="1800"/>
+              <a:defRPr sz="600"/>
             </a:lvl5pPr>
             <a:lvl6pPr>
-              <a:defRPr sz="1800"/>
+              <a:defRPr sz="600"/>
             </a:lvl6pPr>
             <a:lvl7pPr>
-              <a:defRPr sz="1800"/>
+              <a:defRPr sz="600"/>
             </a:lvl7pPr>
             <a:lvl8pPr>
-              <a:defRPr sz="1800"/>
+              <a:defRPr sz="600"/>
             </a:lvl8pPr>
             <a:lvl9pPr>
-              <a:defRPr sz="1800"/>
+              <a:defRPr sz="600"/>
             </a:lvl9pPr>
             <a:lvl1pPr algn="l">
               <a:defRPr sz="1050" b="0">
@@ -5866,6 +7708,39 @@
                 <a:cs typeface="MS PGothic"/>
               </a:defRPr>
             </a:lvl1pPr>
+            <a:lvl2pPr algn="r" marL="0" indent="0">
+              <a:buNone/>
+              <a:defRPr sz="800" b="0">
+                <a:solidFill>
+                  <a:srgbClr val="FFFFFF"/>
+                </a:solidFill>
+                <a:latin typeface="MS PGothic"/>
+                <a:ea typeface="MS PGothic"/>
+                <a:cs typeface="MS PGothic"/>
+              </a:defRPr>
+            </a:lvl2pPr>
+            <a:lvl3pPr algn="r" marL="0" indent="0">
+              <a:buNone/>
+              <a:defRPr sz="700" b="0">
+                <a:solidFill>
+                  <a:srgbClr val="FFFFFF"/>
+                </a:solidFill>
+                <a:latin typeface="MS PGothic"/>
+                <a:ea typeface="MS PGothic"/>
+                <a:cs typeface="MS PGothic"/>
+              </a:defRPr>
+            </a:lvl3pPr>
+            <a:lvl4pPr algn="r" marL="0" indent="0">
+              <a:buNone/>
+              <a:defRPr sz="550" b="0">
+                <a:solidFill>
+                  <a:srgbClr val="FFFFFF"/>
+                </a:solidFill>
+                <a:latin typeface="MS PGothic"/>
+                <a:ea typeface="MS PGothic"/>
+                <a:cs typeface="MS PGothic"/>
+              </a:defRPr>
+            </a:lvl4pPr>
           </a:lstStyle>
           <a:p>
             <a:r>
@@ -5905,6 +7780,39 @@
                 <a:cs typeface="MS PGothic"/>
               </a:defRPr>
             </a:lvl1pPr>
+            <a:lvl2pPr algn="l" marL="0" indent="0">
+              <a:buNone/>
+              <a:defRPr sz="750" b="0">
+                <a:solidFill>
+                  <a:srgbClr val="595959"/>
+                </a:solidFill>
+                <a:latin typeface="MS PGothic"/>
+                <a:ea typeface="MS PGothic"/>
+                <a:cs typeface="MS PGothic"/>
+              </a:defRPr>
+            </a:lvl2pPr>
+            <a:lvl3pPr algn="l" marL="0" indent="0">
+              <a:buNone/>
+              <a:defRPr sz="650" b="0">
+                <a:solidFill>
+                  <a:srgbClr val="595959"/>
+                </a:solidFill>
+                <a:latin typeface="MS PGothic"/>
+                <a:ea typeface="MS PGothic"/>
+                <a:cs typeface="MS PGothic"/>
+              </a:defRPr>
+            </a:lvl3pPr>
+            <a:lvl4pPr algn="l" marL="0" indent="0">
+              <a:buNone/>
+              <a:defRPr sz="550" b="0">
+                <a:solidFill>
+                  <a:srgbClr val="595959"/>
+                </a:solidFill>
+                <a:latin typeface="MS PGothic"/>
+                <a:ea typeface="MS PGothic"/>
+                <a:cs typeface="MS PGothic"/>
+              </a:defRPr>
+            </a:lvl4pPr>
           </a:lstStyle>
           <a:p>
             <a:r>
@@ -6190,35 +8098,35 @@
           <a:lstStyle>
             <a:lvl2pPr marL="457200" indent="0">
               <a:buNone/>
-              <a:defRPr sz="2000" b="1"/>
+              <a:defRPr sz="750" b="1"/>
             </a:lvl2pPr>
             <a:lvl3pPr marL="914400" indent="0">
               <a:buNone/>
-              <a:defRPr sz="1800" b="1"/>
+              <a:defRPr sz="700" b="1"/>
             </a:lvl3pPr>
             <a:lvl4pPr marL="1371600" indent="0">
               <a:buNone/>
-              <a:defRPr sz="1600" b="1"/>
+              <a:defRPr sz="600" b="1"/>
             </a:lvl4pPr>
             <a:lvl5pPr marL="1828800" indent="0">
               <a:buNone/>
-              <a:defRPr sz="1600" b="1"/>
+              <a:defRPr sz="600" b="1"/>
             </a:lvl5pPr>
             <a:lvl6pPr marL="2286000" indent="0">
               <a:buNone/>
-              <a:defRPr sz="1600" b="1"/>
+              <a:defRPr sz="600" b="1"/>
             </a:lvl6pPr>
             <a:lvl7pPr marL="2743200" indent="0">
               <a:buNone/>
-              <a:defRPr sz="1600" b="1"/>
+              <a:defRPr sz="600" b="1"/>
             </a:lvl7pPr>
             <a:lvl8pPr marL="3200400" indent="0">
               <a:buNone/>
-              <a:defRPr sz="1600" b="1"/>
+              <a:defRPr sz="600" b="1"/>
             </a:lvl8pPr>
             <a:lvl9pPr marL="3657600" indent="0">
               <a:buNone/>
-              <a:defRPr sz="1600" b="1"/>
+              <a:defRPr sz="600" b="1"/>
             </a:lvl9pPr>
             <a:lvl1pPr algn="l" indent="0" marL="0">
               <a:buNone/>
@@ -6258,28 +8166,28 @@
           <a:bodyPr anchor="t"/>
           <a:lstStyle>
             <a:lvl2pPr>
-              <a:defRPr sz="2000"/>
+              <a:defRPr sz="650"/>
             </a:lvl2pPr>
             <a:lvl3pPr>
-              <a:defRPr sz="1800"/>
+              <a:defRPr sz="600"/>
             </a:lvl3pPr>
             <a:lvl4pPr>
-              <a:defRPr sz="1600"/>
+              <a:defRPr sz="550"/>
             </a:lvl4pPr>
             <a:lvl5pPr>
-              <a:defRPr sz="1600"/>
+              <a:defRPr sz="550"/>
             </a:lvl5pPr>
             <a:lvl6pPr>
-              <a:defRPr sz="1600"/>
+              <a:defRPr sz="550"/>
             </a:lvl6pPr>
             <a:lvl7pPr>
-              <a:defRPr sz="1600"/>
+              <a:defRPr sz="550"/>
             </a:lvl7pPr>
             <a:lvl8pPr>
-              <a:defRPr sz="1600"/>
+              <a:defRPr sz="550"/>
             </a:lvl8pPr>
             <a:lvl9pPr>
-              <a:defRPr sz="1600"/>
+              <a:defRPr sz="550"/>
             </a:lvl9pPr>
             <a:lvl1pPr algn="l">
               <a:defRPr sz="1050" b="0">
@@ -6348,35 +8256,35 @@
           <a:lstStyle>
             <a:lvl2pPr marL="457200" indent="0">
               <a:buNone/>
-              <a:defRPr sz="2000" b="1"/>
+              <a:defRPr sz="100" b="1"/>
             </a:lvl2pPr>
             <a:lvl3pPr marL="914400" indent="0">
               <a:buNone/>
-              <a:defRPr sz="1800" b="1"/>
+              <a:defRPr sz="100" b="1"/>
             </a:lvl3pPr>
             <a:lvl4pPr marL="1371600" indent="0">
               <a:buNone/>
-              <a:defRPr sz="1600" b="1"/>
+              <a:defRPr sz="100" b="1"/>
             </a:lvl4pPr>
             <a:lvl5pPr marL="1828800" indent="0">
               <a:buNone/>
-              <a:defRPr sz="1600" b="1"/>
+              <a:defRPr sz="100" b="1"/>
             </a:lvl5pPr>
             <a:lvl6pPr marL="2286000" indent="0">
               <a:buNone/>
-              <a:defRPr sz="1600" b="1"/>
+              <a:defRPr sz="100" b="1"/>
             </a:lvl6pPr>
             <a:lvl7pPr marL="2743200" indent="0">
               <a:buNone/>
-              <a:defRPr sz="1600" b="1"/>
+              <a:defRPr sz="100" b="1"/>
             </a:lvl7pPr>
             <a:lvl8pPr marL="3200400" indent="0">
               <a:buNone/>
-              <a:defRPr sz="1600" b="1"/>
+              <a:defRPr sz="100" b="1"/>
             </a:lvl8pPr>
             <a:lvl9pPr marL="3657600" indent="0">
               <a:buNone/>
-              <a:defRPr sz="1600" b="1"/>
+              <a:defRPr sz="100" b="1"/>
             </a:lvl9pPr>
             <a:lvl1pPr algn="l" indent="0" marL="0">
               <a:buNone/>
@@ -6416,28 +8324,28 @@
           <a:bodyPr anchor="t"/>
           <a:lstStyle>
             <a:lvl2pPr>
-              <a:defRPr sz="2000"/>
+              <a:defRPr sz="650"/>
             </a:lvl2pPr>
             <a:lvl3pPr>
-              <a:defRPr sz="1800"/>
+              <a:defRPr sz="600"/>
             </a:lvl3pPr>
             <a:lvl4pPr>
-              <a:defRPr sz="1600"/>
+              <a:defRPr sz="550"/>
             </a:lvl4pPr>
             <a:lvl5pPr>
-              <a:defRPr sz="1600"/>
+              <a:defRPr sz="550"/>
             </a:lvl5pPr>
             <a:lvl6pPr>
-              <a:defRPr sz="1600"/>
+              <a:defRPr sz="550"/>
             </a:lvl6pPr>
             <a:lvl7pPr>
-              <a:defRPr sz="1600"/>
+              <a:defRPr sz="550"/>
             </a:lvl7pPr>
             <a:lvl8pPr>
-              <a:defRPr sz="1600"/>
+              <a:defRPr sz="550"/>
             </a:lvl8pPr>
             <a:lvl9pPr>
-              <a:defRPr sz="1600"/>
+              <a:defRPr sz="550"/>
             </a:lvl9pPr>
             <a:lvl1pPr algn="l">
               <a:defRPr sz="1050" b="0">
@@ -6601,6 +8509,39 @@
                 <a:cs typeface="MS PGothic"/>
               </a:defRPr>
             </a:lvl1pPr>
+            <a:lvl2pPr algn="r" marL="0" indent="0">
+              <a:buNone/>
+              <a:defRPr sz="800" b="0">
+                <a:solidFill>
+                  <a:srgbClr val="FFFFFF"/>
+                </a:solidFill>
+                <a:latin typeface="MS PGothic"/>
+                <a:ea typeface="MS PGothic"/>
+                <a:cs typeface="MS PGothic"/>
+              </a:defRPr>
+            </a:lvl2pPr>
+            <a:lvl3pPr algn="r" marL="0" indent="0">
+              <a:buNone/>
+              <a:defRPr sz="700" b="0">
+                <a:solidFill>
+                  <a:srgbClr val="FFFFFF"/>
+                </a:solidFill>
+                <a:latin typeface="MS PGothic"/>
+                <a:ea typeface="MS PGothic"/>
+                <a:cs typeface="MS PGothic"/>
+              </a:defRPr>
+            </a:lvl3pPr>
+            <a:lvl4pPr algn="r" marL="0" indent="0">
+              <a:buNone/>
+              <a:defRPr sz="550" b="0">
+                <a:solidFill>
+                  <a:srgbClr val="FFFFFF"/>
+                </a:solidFill>
+                <a:latin typeface="MS PGothic"/>
+                <a:ea typeface="MS PGothic"/>
+                <a:cs typeface="MS PGothic"/>
+              </a:defRPr>
+            </a:lvl4pPr>
           </a:lstStyle>
           <a:p>
             <a:r>
@@ -6640,6 +8581,39 @@
                 <a:cs typeface="MS PGothic"/>
               </a:defRPr>
             </a:lvl1pPr>
+            <a:lvl2pPr algn="l" marL="0" indent="0">
+              <a:buNone/>
+              <a:defRPr sz="750" b="0">
+                <a:solidFill>
+                  <a:srgbClr val="595959"/>
+                </a:solidFill>
+                <a:latin typeface="MS PGothic"/>
+                <a:ea typeface="MS PGothic"/>
+                <a:cs typeface="MS PGothic"/>
+              </a:defRPr>
+            </a:lvl2pPr>
+            <a:lvl3pPr algn="l" marL="0" indent="0">
+              <a:buNone/>
+              <a:defRPr sz="650" b="0">
+                <a:solidFill>
+                  <a:srgbClr val="595959"/>
+                </a:solidFill>
+                <a:latin typeface="MS PGothic"/>
+                <a:ea typeface="MS PGothic"/>
+                <a:cs typeface="MS PGothic"/>
+              </a:defRPr>
+            </a:lvl3pPr>
+            <a:lvl4pPr algn="l" marL="0" indent="0">
+              <a:buNone/>
+              <a:defRPr sz="550" b="0">
+                <a:solidFill>
+                  <a:srgbClr val="595959"/>
+                </a:solidFill>
+                <a:latin typeface="MS PGothic"/>
+                <a:ea typeface="MS PGothic"/>
+                <a:cs typeface="MS PGothic"/>
+              </a:defRPr>
+            </a:lvl4pPr>
           </a:lstStyle>
           <a:p>
             <a:r>
@@ -6860,6 +8834,36 @@
                 <a:ea typeface="MS PGothic"/>
               </a:defRPr>
             </a:lvl1pPr>
+            <a:lvl2pPr algn="l" marL="0" indent="0">
+              <a:buNone/>
+              <a:defRPr sz="900" b="0" i="1">
+                <a:solidFill>
+                  <a:srgbClr val="595959"/>
+                </a:solidFill>
+                <a:latin typeface="MS PGothic"/>
+                <a:ea typeface="MS PGothic"/>
+              </a:defRPr>
+            </a:lvl2pPr>
+            <a:lvl3pPr algn="l" marL="0" indent="0">
+              <a:buNone/>
+              <a:defRPr sz="750" b="0" i="1">
+                <a:solidFill>
+                  <a:srgbClr val="595959"/>
+                </a:solidFill>
+                <a:latin typeface="MS PGothic"/>
+                <a:ea typeface="MS PGothic"/>
+              </a:defRPr>
+            </a:lvl3pPr>
+            <a:lvl4pPr algn="l" marL="0" indent="0">
+              <a:buNone/>
+              <a:defRPr sz="650" b="0" i="1">
+                <a:solidFill>
+                  <a:srgbClr val="595959"/>
+                </a:solidFill>
+                <a:latin typeface="MS PGothic"/>
+                <a:ea typeface="MS PGothic"/>
+              </a:defRPr>
+            </a:lvl4pPr>
           </a:lstStyle>
           <a:p>
             <a:r>
@@ -6920,6 +8924,39 @@
                 <a:cs typeface="MS PGothic"/>
               </a:defRPr>
             </a:lvl1pPr>
+            <a:lvl2pPr algn="r" marL="0" indent="0">
+              <a:buNone/>
+              <a:defRPr sz="800" b="0">
+                <a:solidFill>
+                  <a:srgbClr val="FFFFFF"/>
+                </a:solidFill>
+                <a:latin typeface="MS PGothic"/>
+                <a:ea typeface="MS PGothic"/>
+                <a:cs typeface="MS PGothic"/>
+              </a:defRPr>
+            </a:lvl2pPr>
+            <a:lvl3pPr algn="r" marL="0" indent="0">
+              <a:buNone/>
+              <a:defRPr sz="700" b="0">
+                <a:solidFill>
+                  <a:srgbClr val="FFFFFF"/>
+                </a:solidFill>
+                <a:latin typeface="MS PGothic"/>
+                <a:ea typeface="MS PGothic"/>
+                <a:cs typeface="MS PGothic"/>
+              </a:defRPr>
+            </a:lvl3pPr>
+            <a:lvl4pPr algn="r" marL="0" indent="0">
+              <a:buNone/>
+              <a:defRPr sz="550" b="0">
+                <a:solidFill>
+                  <a:srgbClr val="FFFFFF"/>
+                </a:solidFill>
+                <a:latin typeface="MS PGothic"/>
+                <a:ea typeface="MS PGothic"/>
+                <a:cs typeface="MS PGothic"/>
+              </a:defRPr>
+            </a:lvl4pPr>
           </a:lstStyle>
           <a:p>
             <a:r>
@@ -6959,6 +8996,39 @@
                 <a:cs typeface="MS PGothic"/>
               </a:defRPr>
             </a:lvl1pPr>
+            <a:lvl2pPr algn="l" marL="0" indent="0">
+              <a:buNone/>
+              <a:defRPr sz="750" b="0">
+                <a:solidFill>
+                  <a:srgbClr val="595959"/>
+                </a:solidFill>
+                <a:latin typeface="MS PGothic"/>
+                <a:ea typeface="MS PGothic"/>
+                <a:cs typeface="MS PGothic"/>
+              </a:defRPr>
+            </a:lvl2pPr>
+            <a:lvl3pPr algn="l" marL="0" indent="0">
+              <a:buNone/>
+              <a:defRPr sz="650" b="0">
+                <a:solidFill>
+                  <a:srgbClr val="595959"/>
+                </a:solidFill>
+                <a:latin typeface="MS PGothic"/>
+                <a:ea typeface="MS PGothic"/>
+                <a:cs typeface="MS PGothic"/>
+              </a:defRPr>
+            </a:lvl3pPr>
+            <a:lvl4pPr algn="l" marL="0" indent="0">
+              <a:buNone/>
+              <a:defRPr sz="550" b="0">
+                <a:solidFill>
+                  <a:srgbClr val="595959"/>
+                </a:solidFill>
+                <a:latin typeface="MS PGothic"/>
+                <a:ea typeface="MS PGothic"/>
+                <a:cs typeface="MS PGothic"/>
+              </a:defRPr>
+            </a:lvl4pPr>
           </a:lstStyle>
           <a:p>
             <a:r>
@@ -7215,7 +9285,7 @@
           <a:lstStyle>
             <a:lvl2pPr marL="457200" indent="0">
               <a:buNone/>
-              <a:defRPr sz="1200"/>
+              <a:defRPr sz="400"/>
             </a:lvl2pPr>
             <a:lvl3pPr marL="914400" indent="0">
               <a:buNone/>
@@ -7378,6 +9448,39 @@
                 <a:cs typeface="MS PGothic"/>
               </a:defRPr>
             </a:lvl1pPr>
+            <a:lvl2pPr algn="r" marL="0" indent="0">
+              <a:buNone/>
+              <a:defRPr sz="800" b="0">
+                <a:solidFill>
+                  <a:srgbClr val="FFFFFF"/>
+                </a:solidFill>
+                <a:latin typeface="MS PGothic"/>
+                <a:ea typeface="MS PGothic"/>
+                <a:cs typeface="MS PGothic"/>
+              </a:defRPr>
+            </a:lvl2pPr>
+            <a:lvl3pPr algn="r" marL="0" indent="0">
+              <a:buNone/>
+              <a:defRPr sz="700" b="0">
+                <a:solidFill>
+                  <a:srgbClr val="FFFFFF"/>
+                </a:solidFill>
+                <a:latin typeface="MS PGothic"/>
+                <a:ea typeface="MS PGothic"/>
+                <a:cs typeface="MS PGothic"/>
+              </a:defRPr>
+            </a:lvl3pPr>
+            <a:lvl4pPr algn="r" marL="0" indent="0">
+              <a:buNone/>
+              <a:defRPr sz="550" b="0">
+                <a:solidFill>
+                  <a:srgbClr val="FFFFFF"/>
+                </a:solidFill>
+                <a:latin typeface="MS PGothic"/>
+                <a:ea typeface="MS PGothic"/>
+                <a:cs typeface="MS PGothic"/>
+              </a:defRPr>
+            </a:lvl4pPr>
           </a:lstStyle>
           <a:p>
             <a:r>
@@ -7417,6 +9520,39 @@
                 <a:cs typeface="MS PGothic"/>
               </a:defRPr>
             </a:lvl1pPr>
+            <a:lvl2pPr algn="l" marL="0" indent="0">
+              <a:buNone/>
+              <a:defRPr sz="750" b="0">
+                <a:solidFill>
+                  <a:srgbClr val="595959"/>
+                </a:solidFill>
+                <a:latin typeface="MS PGothic"/>
+                <a:ea typeface="MS PGothic"/>
+                <a:cs typeface="MS PGothic"/>
+              </a:defRPr>
+            </a:lvl2pPr>
+            <a:lvl3pPr algn="l" marL="0" indent="0">
+              <a:buNone/>
+              <a:defRPr sz="650" b="0">
+                <a:solidFill>
+                  <a:srgbClr val="595959"/>
+                </a:solidFill>
+                <a:latin typeface="MS PGothic"/>
+                <a:ea typeface="MS PGothic"/>
+                <a:cs typeface="MS PGothic"/>
+              </a:defRPr>
+            </a:lvl3pPr>
+            <a:lvl4pPr algn="l" marL="0" indent="0">
+              <a:buNone/>
+              <a:defRPr sz="550" b="0">
+                <a:solidFill>
+                  <a:srgbClr val="595959"/>
+                </a:solidFill>
+                <a:latin typeface="MS PGothic"/>
+                <a:ea typeface="MS PGothic"/>
+                <a:cs typeface="MS PGothic"/>
+              </a:defRPr>
+            </a:lvl4pPr>
           </a:lstStyle>
           <a:p>
             <a:r>
